--- a/thesis/abs/slide-bao-ve.pptx
+++ b/thesis/abs/slide-bao-ve.pptx
@@ -1011,7 +1011,7 @@
           <a:lstStyle/>
           <a:p>
             <a:r>
-              <a:t>Kiểm thử tích hợp chạy trên PostgreSQL thật qua Testcontainers, vì ràng buộc loại trừ là tính năng của PostgreSQL — giả lập bằng cơ sở dữ liệu trong bộ nhớ thì đúng thứ cần kiểm lại không tồn tại.</a:t>
+              <a:t>Kiểm thử tích hợp chạy trên PostgreSQL thật qua Testcontainers, vì ràng buộc loại trừ là tính năng của PostgreSQL — giả lập bằng cơ sở dữ liệu trong bộ nhớ thì đúng thứ cần kiểm lại không tồn tại. Nếu thầy cô hỏi: lần chạy đầy đủ gần nhất xanh 129 ca; bảy ca của lớp kiểm thử nút mô phỏng chuyển khoản bổ sung sau đó em mới kiểm chứng bằng cách gọi trực tiếp qua HTTP, chưa qua một lần chạy đầy đủ cả 136 ca.</a:t>
             </a:r>
           </a:p>
         </p:txBody>
@@ -1081,7 +1081,7 @@
           <a:lstStyle/>
           <a:p>
             <a:r>
-              <a:t>Quét tự động ngay trên bản đóng gói đang chạy, đi qua đúng máy chủ web và đúng chính sách bảo mật nội dung của bản triển khai.</a:t>
+              <a:t>Bảng trên slide là kết quả quét thật, không phải con số em tự ghi: mỗi dòng là một màn hình, cột giữa là số vi phạm. Quét ngay trên bản đóng gói đang chạy, đi qua đúng máy chủ web và đúng chính sách bảo mật nội dung của bản triển khai.</a:t>
             </a:r>
           </a:p>
         </p:txBody>
@@ -4853,7 +4853,7 @@
     <p:bg>
       <p:bgPr>
         <a:solidFill>
-          <a:srgbClr val="0F5C4C"/>
+          <a:srgbClr val="0E5C63"/>
         </a:solidFill>
         <a:effectLst/>
       </p:bgPr>
@@ -4964,7 +4964,7 @@
                 </a:solidFill>
                 <a:latin typeface="Times New Roman"/>
               </a:rPr>
-              <a:t>VÀ ĐẶT PHÒNG HOMESTAY TVH</a:t>
+              <a:t>VÀ ĐẶT PHÒNG HOMESTAY – HOMESTAY TVH</a:t>
             </a:r>
           </a:p>
           <a:p>
@@ -4980,7 +4980,7 @@
                 </a:solidFill>
                 <a:latin typeface="Times New Roman"/>
               </a:rPr>
-              <a:t>Giảng viên hướng dẫn:  . . . . . . . . . . . . . . . . . . . .</a:t>
+              <a:t>Giảng viên hướng dẫn:  ThS. Nguyễn Nhứt Lam</a:t>
             </a:r>
           </a:p>
           <a:p>
@@ -4996,7 +4996,7 @@
                 </a:solidFill>
                 <a:latin typeface="Times New Roman"/>
               </a:rPr>
-              <a:t>Sinh viên thực hiện:  . . . . . . . . . . . . . . . . . . . .</a:t>
+              <a:t>Sinh viên thực hiện:  Nguyễn Hồng Quân</a:t>
             </a:r>
           </a:p>
           <a:p>
@@ -5012,7 +5012,7 @@
                 </a:solidFill>
                 <a:latin typeface="Times New Roman"/>
               </a:rPr>
-              <a:t>Mã số sinh viên:  . . . . . . . . . . .      Lớp:  . . . . . . . . . . .</a:t>
+              <a:t>Mã số sinh viên:  170123592      Lớp:  DX23TT11</a:t>
             </a:r>
           </a:p>
         </p:txBody>
@@ -5058,7 +5058,7 @@
             <a:avLst/>
           </a:prstGeom>
           <a:solidFill>
-            <a:srgbClr val="0F5C4C"/>
+            <a:srgbClr val="0E5C63"/>
           </a:solidFill>
           <a:ln>
             <a:noFill/>
@@ -5111,7 +5111,7 @@
             <a:r>
               <a:rPr sz="4000" b="1" i="0">
                 <a:solidFill>
-                  <a:srgbClr val="0F5C4C"/>
+                  <a:srgbClr val="0E5C63"/>
                 </a:solidFill>
                 <a:latin typeface="Times New Roman"/>
               </a:rPr>
@@ -5150,7 +5150,7 @@
             <a:r>
               <a:rPr sz="3200" b="0" i="0">
                 <a:solidFill>
-                  <a:srgbClr val="1C1917"/>
+                  <a:srgbClr val="1A1A17"/>
                 </a:solidFill>
                 <a:latin typeface="Times New Roman"/>
               </a:rPr>
@@ -5166,7 +5166,7 @@
             <a:r>
               <a:rPr sz="3200" b="0" i="0">
                 <a:solidFill>
-                  <a:srgbClr val="1C1917"/>
+                  <a:srgbClr val="1A1A17"/>
                 </a:solidFill>
                 <a:latin typeface="Times New Roman"/>
               </a:rPr>
@@ -5182,7 +5182,7 @@
             <a:r>
               <a:rPr sz="3200" b="0" i="0">
                 <a:solidFill>
-                  <a:srgbClr val="1C1917"/>
+                  <a:srgbClr val="1A1A17"/>
                 </a:solidFill>
                 <a:latin typeface="Times New Roman"/>
               </a:rPr>
@@ -5198,7 +5198,7 @@
             <a:r>
               <a:rPr sz="3200" b="0" i="0">
                 <a:solidFill>
-                  <a:srgbClr val="1C1917"/>
+                  <a:srgbClr val="1A1A17"/>
                 </a:solidFill>
                 <a:latin typeface="Times New Roman"/>
               </a:rPr>
@@ -5248,7 +5248,7 @@
             <a:avLst/>
           </a:prstGeom>
           <a:solidFill>
-            <a:srgbClr val="0F5C4C"/>
+            <a:srgbClr val="0E5C63"/>
           </a:solidFill>
           <a:ln>
             <a:noFill/>
@@ -5301,11 +5301,11 @@
             <a:r>
               <a:rPr sz="4000" b="1" i="0">
                 <a:solidFill>
-                  <a:srgbClr val="0F5C4C"/>
+                  <a:srgbClr val="0E5C63"/>
                 </a:solidFill>
                 <a:latin typeface="Times New Roman"/>
               </a:rPr>
-              <a:t>Cơ sở dữ liệu: 21 bảng, 8 migration</a:t>
+              <a:t>Cơ sở dữ liệu: 21 bảng, 9 migration</a:t>
             </a:r>
           </a:p>
         </p:txBody>
@@ -5375,7 +5375,7 @@
             <a:avLst/>
           </a:prstGeom>
           <a:solidFill>
-            <a:srgbClr val="0F5C4C"/>
+            <a:srgbClr val="0E5C63"/>
           </a:solidFill>
           <a:ln>
             <a:noFill/>
@@ -5428,7 +5428,7 @@
             <a:r>
               <a:rPr sz="4400" b="1" i="0">
                 <a:solidFill>
-                  <a:srgbClr val="0F5C4C"/>
+                  <a:srgbClr val="0E5C63"/>
                 </a:solidFill>
                 <a:latin typeface="Times New Roman"/>
               </a:rPr>
@@ -5502,7 +5502,7 @@
             <a:avLst/>
           </a:prstGeom>
           <a:solidFill>
-            <a:srgbClr val="0F5C4C"/>
+            <a:srgbClr val="0E5C63"/>
           </a:solidFill>
           <a:ln>
             <a:noFill/>
@@ -5555,7 +5555,7 @@
             <a:r>
               <a:rPr sz="4400" b="1" i="0">
                 <a:solidFill>
-                  <a:srgbClr val="0F5C4C"/>
+                  <a:srgbClr val="0E5C63"/>
                 </a:solidFill>
                 <a:latin typeface="Times New Roman"/>
               </a:rPr>
@@ -5629,7 +5629,7 @@
             <a:avLst/>
           </a:prstGeom>
           <a:solidFill>
-            <a:srgbClr val="0F5C4C"/>
+            <a:srgbClr val="0E5C63"/>
           </a:solidFill>
           <a:ln>
             <a:noFill/>
@@ -5682,7 +5682,7 @@
             <a:r>
               <a:rPr sz="4000" b="1" i="0">
                 <a:solidFill>
-                  <a:srgbClr val="0F5C4C"/>
+                  <a:srgbClr val="0E5C63"/>
                 </a:solidFill>
                 <a:latin typeface="Times New Roman"/>
               </a:rPr>
@@ -5693,7 +5693,7 @@
       </p:sp>
       <p:pic>
         <p:nvPicPr>
-          <p:cNvPr id="4" name="Picture 3" descr="hinh-3-14-ba-buoc-dat-phong.png"/>
+          <p:cNvPr id="4" name="Picture 3" descr="hinh-3-11-ba-buoc-dat-phong.png"/>
           <p:cNvPicPr>
             <a:picLocks noChangeAspect="1"/>
           </p:cNvPicPr>
@@ -5707,8 +5707,8 @@
         </p:blipFill>
         <p:spPr>
           <a:xfrm>
-            <a:off x="1080000" y="2380410"/>
-            <a:ext cx="10033200" cy="3177179"/>
+            <a:off x="1080000" y="2735752"/>
+            <a:ext cx="10033200" cy="2466495"/>
           </a:xfrm>
           <a:prstGeom prst="rect">
             <a:avLst/>
@@ -5756,7 +5756,7 @@
             <a:avLst/>
           </a:prstGeom>
           <a:solidFill>
-            <a:srgbClr val="0F5C4C"/>
+            <a:srgbClr val="0E5C63"/>
           </a:solidFill>
           <a:ln>
             <a:noFill/>
@@ -5809,7 +5809,7 @@
             <a:r>
               <a:rPr sz="4400" b="1" i="0">
                 <a:solidFill>
-                  <a:srgbClr val="0F5C4C"/>
+                  <a:srgbClr val="0E5C63"/>
                 </a:solidFill>
                 <a:latin typeface="Times New Roman"/>
               </a:rPr>
@@ -5820,7 +5820,7 @@
       </p:sp>
       <p:pic>
         <p:nvPicPr>
-          <p:cNvPr id="4" name="Picture 3" descr="hinh-3-16-dashboard.png"/>
+          <p:cNvPr id="4" name="Picture 3" descr="hinh-3-13-dashboard.png"/>
           <p:cNvPicPr>
             <a:picLocks noChangeAspect="1"/>
           </p:cNvPicPr>
@@ -5883,7 +5883,7 @@
             <a:avLst/>
           </a:prstGeom>
           <a:solidFill>
-            <a:srgbClr val="0F5C4C"/>
+            <a:srgbClr val="0E5C63"/>
           </a:solidFill>
           <a:ln>
             <a:noFill/>
@@ -5936,7 +5936,7 @@
             <a:r>
               <a:rPr sz="4400" b="1" i="0">
                 <a:solidFill>
-                  <a:srgbClr val="0F5C4C"/>
+                  <a:srgbClr val="0E5C63"/>
                 </a:solidFill>
                 <a:latin typeface="Times New Roman"/>
               </a:rPr>
@@ -5975,11 +5975,11 @@
             <a:r>
               <a:rPr sz="3200" b="0" i="0">
                 <a:solidFill>
-                  <a:srgbClr val="1C1917"/>
+                  <a:srgbClr val="1A1A17"/>
                 </a:solidFill>
                 <a:latin typeface="Times New Roman"/>
               </a:rPr>
-              <a:t>▪  129 ca kiểm thử, tất cả đạt</a:t>
+              <a:t>▪  136 ca kiểm thử trong 19 lớp</a:t>
             </a:r>
           </a:p>
           <a:p>
@@ -5991,7 +5991,7 @@
             <a:r>
               <a:rPr sz="3200" b="0" i="0">
                 <a:solidFill>
-                  <a:srgbClr val="1C1917"/>
+                  <a:srgbClr val="1A1A17"/>
                 </a:solidFill>
                 <a:latin typeface="Times New Roman"/>
               </a:rPr>
@@ -6007,7 +6007,7 @@
             <a:r>
               <a:rPr sz="3200" b="0" i="0">
                 <a:solidFill>
-                  <a:srgbClr val="1C1917"/>
+                  <a:srgbClr val="1A1A17"/>
                 </a:solidFill>
                 <a:latin typeface="Times New Roman"/>
               </a:rPr>
@@ -6023,7 +6023,7 @@
             <a:r>
               <a:rPr sz="3200" b="0" i="0">
                 <a:solidFill>
-                  <a:srgbClr val="1C1917"/>
+                  <a:srgbClr val="1A1A17"/>
                 </a:solidFill>
                 <a:latin typeface="Times New Roman"/>
               </a:rPr>
@@ -6073,7 +6073,7 @@
             <a:avLst/>
           </a:prstGeom>
           <a:solidFill>
-            <a:srgbClr val="0F5C4C"/>
+            <a:srgbClr val="0E5C63"/>
           </a:solidFill>
           <a:ln>
             <a:noFill/>
@@ -6126,7 +6126,7 @@
             <a:r>
               <a:rPr sz="4400" b="1" i="0">
                 <a:solidFill>
-                  <a:srgbClr val="0F5C4C"/>
+                  <a:srgbClr val="0E5C63"/>
                 </a:solidFill>
                 <a:latin typeface="Times New Roman"/>
               </a:rPr>
@@ -6165,11 +6165,11 @@
             <a:r>
               <a:rPr sz="2800" b="0" i="0">
                 <a:solidFill>
-                  <a:srgbClr val="1C1917"/>
+                  <a:srgbClr val="1A1A17"/>
                 </a:solidFill>
                 <a:latin typeface="Times New Roman"/>
               </a:rPr>
-              <a:t>▪  Quét 17 màn hình: 0 vi phạm WCAG 2.1 mức A và AA</a:t>
+              <a:t>▪  Quét 17 màn hình: 0 vi phạm WCAG 2.1 mức A và AA, 353 lần quy tắc đạt</a:t>
             </a:r>
           </a:p>
           <a:p>
@@ -6181,7 +6181,7 @@
             <a:r>
               <a:rPr sz="2800" b="0" i="0">
                 <a:solidFill>
-                  <a:srgbClr val="1C1917"/>
+                  <a:srgbClr val="1A1A17"/>
                 </a:solidFill>
                 <a:latin typeface="Times New Roman"/>
               </a:rPr>
@@ -6197,7 +6197,7 @@
             <a:r>
               <a:rPr sz="2800" b="0" i="0">
                 <a:solidFill>
-                  <a:srgbClr val="1C1917"/>
+                  <a:srgbClr val="1A1A17"/>
                 </a:solidFill>
                 <a:latin typeface="Times New Roman"/>
               </a:rPr>
@@ -6208,7 +6208,7 @@
       </p:sp>
       <p:pic>
         <p:nvPicPr>
-          <p:cNvPr id="5" name="Picture 4" descr="hinh-3-20-docker-compose-ps.png"/>
+          <p:cNvPr id="5" name="Picture 4" descr="hinh-4-2-quet-kha-nang-tiep-can.png"/>
           <p:cNvPicPr>
             <a:picLocks noChangeAspect="1"/>
           </p:cNvPicPr>
@@ -6222,8 +6222,8 @@
         </p:blipFill>
         <p:spPr>
           <a:xfrm>
-            <a:off x="6120000" y="3530058"/>
-            <a:ext cx="5472000" cy="877882"/>
+            <a:off x="6120000" y="2416074"/>
+            <a:ext cx="5472000" cy="3105850"/>
           </a:xfrm>
           <a:prstGeom prst="rect">
             <a:avLst/>
@@ -6271,7 +6271,7 @@
             <a:avLst/>
           </a:prstGeom>
           <a:solidFill>
-            <a:srgbClr val="0F5C4C"/>
+            <a:srgbClr val="0E5C63"/>
           </a:solidFill>
           <a:ln>
             <a:noFill/>
@@ -6324,7 +6324,7 @@
             <a:r>
               <a:rPr sz="4400" b="1" i="0">
                 <a:solidFill>
-                  <a:srgbClr val="0F5C4C"/>
+                  <a:srgbClr val="0E5C63"/>
                 </a:solidFill>
                 <a:latin typeface="Times New Roman"/>
               </a:rPr>
@@ -6363,7 +6363,7 @@
             <a:r>
               <a:rPr sz="3200" b="0" i="0">
                 <a:solidFill>
-                  <a:srgbClr val="1C1917"/>
+                  <a:srgbClr val="1A1A17"/>
                 </a:solidFill>
                 <a:latin typeface="Times New Roman"/>
               </a:rPr>
@@ -6379,7 +6379,7 @@
             <a:r>
               <a:rPr sz="3200" b="0" i="0">
                 <a:solidFill>
-                  <a:srgbClr val="1C1917"/>
+                  <a:srgbClr val="1A1A17"/>
                 </a:solidFill>
                 <a:latin typeface="Times New Roman"/>
               </a:rPr>
@@ -6395,7 +6395,7 @@
             <a:r>
               <a:rPr sz="3200" b="0" i="0">
                 <a:solidFill>
-                  <a:srgbClr val="1C1917"/>
+                  <a:srgbClr val="1A1A17"/>
                 </a:solidFill>
                 <a:latin typeface="Times New Roman"/>
               </a:rPr>
@@ -6445,7 +6445,7 @@
             <a:avLst/>
           </a:prstGeom>
           <a:solidFill>
-            <a:srgbClr val="0F5C4C"/>
+            <a:srgbClr val="0E5C63"/>
           </a:solidFill>
           <a:ln>
             <a:noFill/>
@@ -6498,7 +6498,7 @@
             <a:r>
               <a:rPr sz="4400" b="1" i="0">
                 <a:solidFill>
-                  <a:srgbClr val="0F5C4C"/>
+                  <a:srgbClr val="0E5C63"/>
                 </a:solidFill>
                 <a:latin typeface="Times New Roman"/>
               </a:rPr>
@@ -6537,7 +6537,7 @@
             <a:r>
               <a:rPr sz="3200" b="0" i="0">
                 <a:solidFill>
-                  <a:srgbClr val="1C1917"/>
+                  <a:srgbClr val="1A1A17"/>
                 </a:solidFill>
                 <a:latin typeface="Times New Roman"/>
               </a:rPr>
@@ -6553,7 +6553,7 @@
             <a:r>
               <a:rPr sz="3200" b="0" i="0">
                 <a:solidFill>
-                  <a:srgbClr val="1C1917"/>
+                  <a:srgbClr val="1A1A17"/>
                 </a:solidFill>
                 <a:latin typeface="Times New Roman"/>
               </a:rPr>
@@ -6569,7 +6569,7 @@
             <a:r>
               <a:rPr sz="3200" b="0" i="0">
                 <a:solidFill>
-                  <a:srgbClr val="1C1917"/>
+                  <a:srgbClr val="1A1A17"/>
                 </a:solidFill>
                 <a:latin typeface="Times New Roman"/>
               </a:rPr>
@@ -6619,7 +6619,7 @@
             <a:avLst/>
           </a:prstGeom>
           <a:solidFill>
-            <a:srgbClr val="0F5C4C"/>
+            <a:srgbClr val="0E5C63"/>
           </a:solidFill>
           <a:ln>
             <a:noFill/>
@@ -6672,7 +6672,7 @@
             <a:r>
               <a:rPr sz="4400" b="1" i="0">
                 <a:solidFill>
-                  <a:srgbClr val="0F5C4C"/>
+                  <a:srgbClr val="0E5C63"/>
                 </a:solidFill>
                 <a:latin typeface="Times New Roman"/>
               </a:rPr>
@@ -6711,7 +6711,7 @@
             <a:r>
               <a:rPr sz="3200" b="0" i="0">
                 <a:solidFill>
-                  <a:srgbClr val="1C1917"/>
+                  <a:srgbClr val="1A1A17"/>
                 </a:solidFill>
                 <a:latin typeface="Times New Roman"/>
               </a:rPr>
@@ -6727,7 +6727,7 @@
             <a:r>
               <a:rPr sz="3200" b="0" i="0">
                 <a:solidFill>
-                  <a:srgbClr val="1C1917"/>
+                  <a:srgbClr val="1A1A17"/>
                 </a:solidFill>
                 <a:latin typeface="Times New Roman"/>
               </a:rPr>
@@ -6743,7 +6743,7 @@
             <a:r>
               <a:rPr sz="3200" b="0" i="0">
                 <a:solidFill>
-                  <a:srgbClr val="1C1917"/>
+                  <a:srgbClr val="1A1A17"/>
                 </a:solidFill>
                 <a:latin typeface="Times New Roman"/>
               </a:rPr>
@@ -6759,7 +6759,7 @@
             <a:r>
               <a:rPr sz="3200" b="0" i="0">
                 <a:solidFill>
-                  <a:srgbClr val="1C1917"/>
+                  <a:srgbClr val="1A1A17"/>
                 </a:solidFill>
                 <a:latin typeface="Times New Roman"/>
               </a:rPr>
@@ -6775,7 +6775,7 @@
             <a:r>
               <a:rPr sz="3200" b="0" i="0">
                 <a:solidFill>
-                  <a:srgbClr val="1C1917"/>
+                  <a:srgbClr val="1A1A17"/>
                 </a:solidFill>
                 <a:latin typeface="Times New Roman"/>
               </a:rPr>
@@ -6798,7 +6798,7 @@
     <p:bg>
       <p:bgPr>
         <a:solidFill>
-          <a:srgbClr val="0F5C4C"/>
+          <a:srgbClr val="0E5C63"/>
         </a:solidFill>
         <a:effectLst/>
       </p:bgPr>
@@ -6902,7 +6902,7 @@
             <a:avLst/>
           </a:prstGeom>
           <a:solidFill>
-            <a:srgbClr val="0F5C4C"/>
+            <a:srgbClr val="0E5C63"/>
           </a:solidFill>
           <a:ln>
             <a:noFill/>
@@ -6955,7 +6955,7 @@
             <a:r>
               <a:rPr sz="3600" b="1" i="0">
                 <a:solidFill>
-                  <a:srgbClr val="0F5C4C"/>
+                  <a:srgbClr val="0E5C63"/>
                 </a:solidFill>
                 <a:latin typeface="Times New Roman"/>
               </a:rPr>
@@ -6994,7 +6994,7 @@
             <a:r>
               <a:rPr sz="2800" b="0" i="0">
                 <a:solidFill>
-                  <a:srgbClr val="1C1917"/>
+                  <a:srgbClr val="1A1A17"/>
                 </a:solidFill>
                 <a:latin typeface="Times New Roman"/>
               </a:rPr>
@@ -7010,7 +7010,7 @@
             <a:r>
               <a:rPr sz="2800" b="0" i="0">
                 <a:solidFill>
-                  <a:srgbClr val="1C1917"/>
+                  <a:srgbClr val="1A1A17"/>
                 </a:solidFill>
                 <a:latin typeface="Times New Roman"/>
               </a:rPr>
@@ -7026,7 +7026,7 @@
             <a:r>
               <a:rPr sz="2800" b="0" i="0">
                 <a:solidFill>
-                  <a:srgbClr val="1C1917"/>
+                  <a:srgbClr val="1A1A17"/>
                 </a:solidFill>
                 <a:latin typeface="Times New Roman"/>
               </a:rPr>
@@ -7051,8 +7051,8 @@
         </p:blipFill>
         <p:spPr>
           <a:xfrm>
-            <a:off x="7750406" y="1584000"/>
-            <a:ext cx="2211187" cy="4770000"/>
+            <a:off x="6120000" y="2664840"/>
+            <a:ext cx="5472000" cy="2608320"/>
           </a:xfrm>
           <a:prstGeom prst="rect">
             <a:avLst/>
@@ -7100,7 +7100,7 @@
             <a:avLst/>
           </a:prstGeom>
           <a:solidFill>
-            <a:srgbClr val="0F5C4C"/>
+            <a:srgbClr val="0E5C63"/>
           </a:solidFill>
           <a:ln>
             <a:noFill/>
@@ -7153,7 +7153,7 @@
             <a:r>
               <a:rPr sz="3600" b="1" i="0">
                 <a:solidFill>
-                  <a:srgbClr val="0F5C4C"/>
+                  <a:srgbClr val="0E5C63"/>
                 </a:solidFill>
                 <a:latin typeface="Times New Roman"/>
               </a:rPr>
@@ -7192,7 +7192,7 @@
             <a:r>
               <a:rPr sz="3200" b="0" i="0">
                 <a:solidFill>
-                  <a:srgbClr val="1C1917"/>
+                  <a:srgbClr val="1A1A17"/>
                 </a:solidFill>
                 <a:latin typeface="Times New Roman"/>
               </a:rPr>
@@ -7208,7 +7208,7 @@
             <a:r>
               <a:rPr sz="3200" b="0" i="0">
                 <a:solidFill>
-                  <a:srgbClr val="1C1917"/>
+                  <a:srgbClr val="1A1A17"/>
                 </a:solidFill>
                 <a:latin typeface="Times New Roman"/>
               </a:rPr>
@@ -7224,7 +7224,7 @@
             <a:r>
               <a:rPr sz="3200" b="0" i="0">
                 <a:solidFill>
-                  <a:srgbClr val="1C1917"/>
+                  <a:srgbClr val="1A1A17"/>
                 </a:solidFill>
                 <a:latin typeface="Times New Roman"/>
               </a:rPr>
@@ -7274,7 +7274,7 @@
             <a:avLst/>
           </a:prstGeom>
           <a:solidFill>
-            <a:srgbClr val="0F5C4C"/>
+            <a:srgbClr val="0E5C63"/>
           </a:solidFill>
           <a:ln>
             <a:noFill/>
@@ -7327,7 +7327,7 @@
             <a:r>
               <a:rPr sz="4400" b="1" i="0">
                 <a:solidFill>
-                  <a:srgbClr val="0F5C4C"/>
+                  <a:srgbClr val="0E5C63"/>
                 </a:solidFill>
                 <a:latin typeface="Times New Roman"/>
               </a:rPr>
@@ -7366,7 +7366,7 @@
             <a:r>
               <a:rPr sz="2800" b="0" i="0">
                 <a:solidFill>
-                  <a:srgbClr val="1C1917"/>
+                  <a:srgbClr val="1A1A17"/>
                 </a:solidFill>
                 <a:latin typeface="Times New Roman"/>
               </a:rPr>
@@ -7382,7 +7382,7 @@
             <a:r>
               <a:rPr sz="2800" b="0" i="0">
                 <a:solidFill>
-                  <a:srgbClr val="1C1917"/>
+                  <a:srgbClr val="1A1A17"/>
                 </a:solidFill>
                 <a:latin typeface="Times New Roman"/>
               </a:rPr>
@@ -7398,7 +7398,7 @@
             <a:r>
               <a:rPr sz="2800" b="0" i="0">
                 <a:solidFill>
-                  <a:srgbClr val="1C1917"/>
+                  <a:srgbClr val="1A1A17"/>
                 </a:solidFill>
                 <a:latin typeface="Times New Roman"/>
               </a:rPr>
@@ -7472,7 +7472,7 @@
             <a:avLst/>
           </a:prstGeom>
           <a:solidFill>
-            <a:srgbClr val="0F5C4C"/>
+            <a:srgbClr val="0E5C63"/>
           </a:solidFill>
           <a:ln>
             <a:noFill/>
@@ -7525,7 +7525,7 @@
             <a:r>
               <a:rPr sz="4400" b="1" i="0">
                 <a:solidFill>
-                  <a:srgbClr val="0F5C4C"/>
+                  <a:srgbClr val="0E5C63"/>
                 </a:solidFill>
                 <a:latin typeface="Times New Roman"/>
               </a:rPr>
@@ -7564,7 +7564,7 @@
             <a:r>
               <a:rPr sz="3200" b="0" i="0">
                 <a:solidFill>
-                  <a:srgbClr val="1C1917"/>
+                  <a:srgbClr val="1A1A17"/>
                 </a:solidFill>
                 <a:latin typeface="Times New Roman"/>
               </a:rPr>
@@ -7580,7 +7580,7 @@
             <a:r>
               <a:rPr sz="3200" b="0" i="0">
                 <a:solidFill>
-                  <a:srgbClr val="1C1917"/>
+                  <a:srgbClr val="1A1A17"/>
                 </a:solidFill>
                 <a:latin typeface="Times New Roman"/>
               </a:rPr>
@@ -7596,7 +7596,7 @@
             <a:r>
               <a:rPr sz="3200" b="0" i="0">
                 <a:solidFill>
-                  <a:srgbClr val="1C1917"/>
+                  <a:srgbClr val="1A1A17"/>
                 </a:solidFill>
                 <a:latin typeface="Times New Roman"/>
               </a:rPr>
@@ -7612,7 +7612,7 @@
             <a:r>
               <a:rPr sz="3200" b="0" i="0">
                 <a:solidFill>
-                  <a:srgbClr val="1C1917"/>
+                  <a:srgbClr val="1A1A17"/>
                 </a:solidFill>
                 <a:latin typeface="Times New Roman"/>
               </a:rPr>
@@ -7662,7 +7662,7 @@
             <a:avLst/>
           </a:prstGeom>
           <a:solidFill>
-            <a:srgbClr val="0F5C4C"/>
+            <a:srgbClr val="0E5C63"/>
           </a:solidFill>
           <a:ln>
             <a:noFill/>
@@ -7715,7 +7715,7 @@
             <a:r>
               <a:rPr sz="4400" b="1" i="0">
                 <a:solidFill>
-                  <a:srgbClr val="0F5C4C"/>
+                  <a:srgbClr val="0E5C63"/>
                 </a:solidFill>
                 <a:latin typeface="Times New Roman"/>
               </a:rPr>
@@ -7754,7 +7754,7 @@
             <a:r>
               <a:rPr sz="3200" b="0" i="0">
                 <a:solidFill>
-                  <a:srgbClr val="1C1917"/>
+                  <a:srgbClr val="1A1A17"/>
                 </a:solidFill>
                 <a:latin typeface="Times New Roman"/>
               </a:rPr>
@@ -7770,7 +7770,7 @@
             <a:r>
               <a:rPr sz="3200" b="0" i="0">
                 <a:solidFill>
-                  <a:srgbClr val="1C1917"/>
+                  <a:srgbClr val="1A1A17"/>
                 </a:solidFill>
                 <a:latin typeface="Times New Roman"/>
               </a:rPr>
@@ -7786,7 +7786,7 @@
             <a:r>
               <a:rPr sz="3200" b="0" i="0">
                 <a:solidFill>
-                  <a:srgbClr val="1C1917"/>
+                  <a:srgbClr val="1A1A17"/>
                 </a:solidFill>
                 <a:latin typeface="Times New Roman"/>
               </a:rPr>
@@ -7802,7 +7802,7 @@
             <a:r>
               <a:rPr sz="3200" b="0" i="0">
                 <a:solidFill>
-                  <a:srgbClr val="1C1917"/>
+                  <a:srgbClr val="1A1A17"/>
                 </a:solidFill>
                 <a:latin typeface="Times New Roman"/>
               </a:rPr>
@@ -7852,7 +7852,7 @@
             <a:avLst/>
           </a:prstGeom>
           <a:solidFill>
-            <a:srgbClr val="0F5C4C"/>
+            <a:srgbClr val="0E5C63"/>
           </a:solidFill>
           <a:ln>
             <a:noFill/>
@@ -7905,7 +7905,7 @@
             <a:r>
               <a:rPr sz="4400" b="1" i="0">
                 <a:solidFill>
-                  <a:srgbClr val="0F5C4C"/>
+                  <a:srgbClr val="0E5C63"/>
                 </a:solidFill>
                 <a:latin typeface="Times New Roman"/>
               </a:rPr>
@@ -7979,7 +7979,7 @@
             <a:avLst/>
           </a:prstGeom>
           <a:solidFill>
-            <a:srgbClr val="0F5C4C"/>
+            <a:srgbClr val="0E5C63"/>
           </a:solidFill>
           <a:ln>
             <a:noFill/>
@@ -8032,7 +8032,7 @@
             <a:r>
               <a:rPr sz="4000" b="1" i="0">
                 <a:solidFill>
-                  <a:srgbClr val="0F5C4C"/>
+                  <a:srgbClr val="0E5C63"/>
                 </a:solidFill>
                 <a:latin typeface="Times New Roman"/>
               </a:rPr>
@@ -8071,7 +8071,7 @@
             <a:r>
               <a:rPr sz="2800" b="0" i="0">
                 <a:solidFill>
-                  <a:srgbClr val="1C1917"/>
+                  <a:srgbClr val="1A1A17"/>
                 </a:solidFill>
                 <a:latin typeface="Times New Roman"/>
               </a:rPr>
@@ -8087,7 +8087,7 @@
             <a:r>
               <a:rPr sz="2800" b="0" i="0">
                 <a:solidFill>
-                  <a:srgbClr val="1C1917"/>
+                  <a:srgbClr val="1A1A17"/>
                 </a:solidFill>
                 <a:latin typeface="Times New Roman"/>
               </a:rPr>
@@ -8103,7 +8103,7 @@
             <a:r>
               <a:rPr sz="2800" b="0" i="0">
                 <a:solidFill>
-                  <a:srgbClr val="1C1917"/>
+                  <a:srgbClr val="1A1A17"/>
                 </a:solidFill>
                 <a:latin typeface="Times New Roman"/>
               </a:rPr>
@@ -8119,7 +8119,7 @@
             <a:r>
               <a:rPr sz="2800" b="0" i="0">
                 <a:solidFill>
-                  <a:srgbClr val="1C1917"/>
+                  <a:srgbClr val="1A1A17"/>
                 </a:solidFill>
                 <a:latin typeface="Times New Roman"/>
               </a:rPr>

--- a/thesis/abs/slide-bao-ve.pptx
+++ b/thesis/abs/slide-bao-ve.pptx
@@ -25,6 +25,7 @@
     <p:sldId id="273" r:id="rId25"/>
     <p:sldId id="274" r:id="rId26"/>
     <p:sldId id="275" r:id="rId27"/>
+    <p:sldId id="276" r:id="rId28"/>
   </p:sldIdLst>
   <p:sldSz cx="12193200" cy="6858000" type="screen4x3"/>
   <p:notesSz cx="6858000" cy="9144000"/>
@@ -1317,6 +1318,76 @@
 </file>
 
 <file path=ppt/notesSlides/notesSlide20.xml><?xml version="1.0" encoding="utf-8"?>
+<p:notes xmlns:a="http://schemas.openxmlformats.org/drawingml/2006/main" xmlns:p="http://schemas.openxmlformats.org/presentationml/2006/main" xmlns:r="http://schemas.openxmlformats.org/officeDocument/2006/relationships">
+  <p:cSld>
+    <p:spTree>
+      <p:nvGrpSpPr>
+        <p:cNvPr id="1" name=""/>
+        <p:cNvGrpSpPr/>
+        <p:nvPr/>
+      </p:nvGrpSpPr>
+      <p:grpSpPr>
+        <a:xfrm>
+          <a:off x="0" y="0"/>
+          <a:ext cx="0" cy="0"/>
+          <a:chOff x="0" y="0"/>
+          <a:chExt cx="0" cy="0"/>
+        </a:xfrm>
+      </p:grpSpPr>
+      <p:sp>
+        <p:nvSpPr>
+          <p:cNvPr id="2" name="Slide Image Placeholder 1"/>
+          <p:cNvSpPr>
+            <a:spLocks noGrp="1"/>
+          </p:cNvSpPr>
+          <p:nvPr>
+            <p:ph type="sldImg" idx="2"/>
+          </p:nvPr>
+        </p:nvSpPr>
+        <p:spPr/>
+      </p:sp>
+      <p:sp>
+        <p:nvSpPr>
+          <p:cNvPr id="3" name="Notes Placeholder 2"/>
+          <p:cNvSpPr>
+            <a:spLocks noGrp="1"/>
+          </p:cNvSpPr>
+          <p:nvPr>
+            <p:ph type="body" idx="3" sz="quarter"/>
+          </p:nvPr>
+        </p:nvSpPr>
+        <p:spPr/>
+        <p:txBody>
+          <a:bodyPr/>
+          <a:lstStyle/>
+          <a:p>
+            <a:r>
+              <a:t>Slide này để hội đồng mở lại bất cứ lúc nào: video thuyết trình, kho mã nguồn và bản trình diễn hệ thống. Kho mã nguồn để công khai nên thầy cô mở được ngay, không cần xin quyền.</a:t>
+            </a:r>
+          </a:p>
+        </p:txBody>
+      </p:sp>
+      <p:sp>
+        <p:nvSpPr>
+          <p:cNvPr id="4" name="Slide Number Placeholder 3"/>
+          <p:cNvSpPr>
+            <a:spLocks noGrp="1"/>
+          </p:cNvSpPr>
+          <p:nvPr>
+            <p:ph type="sldNum" idx="5" sz="quarter"/>
+          </p:nvPr>
+        </p:nvSpPr>
+        <p:spPr/>
+      </p:sp>
+    </p:spTree>
+  </p:cSld>
+  <p:clrMapOvr>
+    <a:masterClrMapping/>
+  </p:clrMapOvr>
+</p:notes>
+</file>
+
+<file path=ppt/notesSlides/notesSlide21.xml><?xml version="1.0" encoding="utf-8"?>
 <p:notes xmlns:a="http://schemas.openxmlformats.org/drawingml/2006/main" xmlns:p="http://schemas.openxmlformats.org/presentationml/2006/main" xmlns:r="http://schemas.openxmlformats.org/officeDocument/2006/relationships">
   <p:cSld>
     <p:spTree>
@@ -6793,6 +6864,196 @@
 </file>
 
 <file path=ppt/slides/slide20.xml><?xml version="1.0" encoding="utf-8"?>
+<p:sld xmlns:a="http://schemas.openxmlformats.org/drawingml/2006/main" xmlns:p="http://schemas.openxmlformats.org/presentationml/2006/main" xmlns:r="http://schemas.openxmlformats.org/officeDocument/2006/relationships">
+  <p:cSld>
+    <p:bg>
+      <p:bgPr>
+        <a:solidFill>
+          <a:srgbClr val="FBF9F6"/>
+        </a:solidFill>
+        <a:effectLst/>
+      </p:bgPr>
+    </p:bg>
+    <p:spTree>
+      <p:nvGrpSpPr>
+        <p:cNvPr id="1" name=""/>
+        <p:cNvGrpSpPr/>
+        <p:nvPr/>
+      </p:nvGrpSpPr>
+      <p:grpSpPr/>
+      <p:sp>
+        <p:nvSpPr>
+          <p:cNvPr id="2" name="Rectangle 1"/>
+          <p:cNvSpPr/>
+          <p:nvPr/>
+        </p:nvSpPr>
+        <p:spPr>
+          <a:xfrm>
+            <a:off x="0" y="0"/>
+            <a:ext cx="12193200" cy="144000"/>
+          </a:xfrm>
+          <a:prstGeom prst="rect">
+            <a:avLst/>
+          </a:prstGeom>
+          <a:solidFill>
+            <a:srgbClr val="0E5C63"/>
+          </a:solidFill>
+          <a:ln>
+            <a:noFill/>
+          </a:ln>
+        </p:spPr>
+        <p:style>
+          <a:lnRef idx="1">
+            <a:schemeClr val="accent1"/>
+          </a:lnRef>
+          <a:fillRef idx="3">
+            <a:schemeClr val="accent1"/>
+          </a:fillRef>
+          <a:effectRef idx="2">
+            <a:schemeClr val="accent1"/>
+          </a:effectRef>
+          <a:fontRef idx="minor">
+            <a:schemeClr val="lt1"/>
+          </a:fontRef>
+        </p:style>
+        <p:txBody>
+          <a:bodyPr rtlCol="0" anchor="ctr"/>
+          <a:lstStyle/>
+          <a:p>
+            <a:pPr algn="ctr"/>
+          </a:p>
+        </p:txBody>
+      </p:sp>
+      <p:sp>
+        <p:nvSpPr>
+          <p:cNvPr id="3" name="TextBox 2"/>
+          <p:cNvSpPr txBox="1"/>
+          <p:nvPr/>
+        </p:nvSpPr>
+        <p:spPr>
+          <a:xfrm>
+            <a:off x="648000" y="396000"/>
+            <a:ext cx="10897200" cy="936000"/>
+          </a:xfrm>
+          <a:prstGeom prst="rect">
+            <a:avLst/>
+          </a:prstGeom>
+          <a:noFill/>
+        </p:spPr>
+        <p:txBody>
+          <a:bodyPr wrap="square" anchor="t">
+            <a:spAutoFit/>
+          </a:bodyPr>
+          <a:lstStyle/>
+          <a:p>
+            <a:r>
+              <a:rPr sz="4400" b="1" i="0">
+                <a:solidFill>
+                  <a:srgbClr val="0E5C63"/>
+                </a:solidFill>
+                <a:latin typeface="Times New Roman"/>
+              </a:rPr>
+              <a:t>Liên kết</a:t>
+            </a:r>
+          </a:p>
+        </p:txBody>
+      </p:sp>
+      <p:sp>
+        <p:nvSpPr>
+          <p:cNvPr id="4" name="TextBox 3"/>
+          <p:cNvSpPr txBox="1"/>
+          <p:nvPr/>
+        </p:nvSpPr>
+        <p:spPr>
+          <a:xfrm>
+            <a:off x="648000" y="1584000"/>
+            <a:ext cx="10897200" cy="4770001"/>
+          </a:xfrm>
+          <a:prstGeom prst="rect">
+            <a:avLst/>
+          </a:prstGeom>
+          <a:noFill/>
+        </p:spPr>
+        <p:txBody>
+          <a:bodyPr wrap="square" anchor="t">
+            <a:spAutoFit/>
+          </a:bodyPr>
+          <a:lstStyle/>
+          <a:p>
+            <a:pPr marL="324000" indent="-324000">
+              <a:spcAft>
+                <a:spcPts val="1600"/>
+              </a:spcAft>
+            </a:pPr>
+            <a:r>
+              <a:rPr sz="3200" b="0" i="0">
+                <a:solidFill>
+                  <a:srgbClr val="1A1A17"/>
+                </a:solidFill>
+                <a:latin typeface="Times New Roman"/>
+              </a:rPr>
+              <a:t>▪  Video thuyết trình:  «DÁN LIÊN KẾT GOOGLE DRIVE VÀO ĐÂY»</a:t>
+            </a:r>
+          </a:p>
+          <a:p>
+            <a:pPr marL="324000" indent="-324000">
+              <a:spcAft>
+                <a:spcPts val="1600"/>
+              </a:spcAft>
+            </a:pPr>
+            <a:r>
+              <a:rPr sz="3200" b="0" i="0">
+                <a:solidFill>
+                  <a:srgbClr val="1A1A17"/>
+                </a:solidFill>
+                <a:latin typeface="Times New Roman"/>
+              </a:rPr>
+              <a:t>▪  Mã nguồn và toàn bộ tài liệu:</a:t>
+            </a:r>
+          </a:p>
+          <a:p>
+            <a:pPr marL="324000" indent="-324000">
+              <a:spcAft>
+                <a:spcPts val="1600"/>
+              </a:spcAft>
+            </a:pPr>
+            <a:r>
+              <a:rPr sz="3200" b="0" i="0">
+                <a:solidFill>
+                  <a:srgbClr val="1A1A17"/>
+                </a:solidFill>
+                <a:latin typeface="Times New Roman"/>
+              </a:rPr>
+              <a:t>▪  github.com/nhquan403/cn-dx23tt11-nguyenhongquan-homestay-tvu</a:t>
+            </a:r>
+          </a:p>
+          <a:p>
+            <a:pPr marL="324000" indent="-324000">
+              <a:spcAft>
+                <a:spcPts val="1600"/>
+              </a:spcAft>
+            </a:pPr>
+            <a:r>
+              <a:rPr sz="3200" b="0" i="0">
+                <a:solidFill>
+                  <a:srgbClr val="1A1A17"/>
+                </a:solidFill>
+                <a:latin typeface="Times New Roman"/>
+              </a:rPr>
+              <a:t>▪  Bản trình diễn hệ thống 10 phút: thesis/abs/ trong kho mã nguồn</a:t>
+            </a:r>
+          </a:p>
+        </p:txBody>
+      </p:sp>
+    </p:spTree>
+  </p:cSld>
+  <p:clrMapOvr>
+    <a:masterClrMapping/>
+  </p:clrMapOvr>
+</p:sld>
+</file>
+
+<file path=ppt/slides/slide21.xml><?xml version="1.0" encoding="utf-8"?>
 <p:sld xmlns:a="http://schemas.openxmlformats.org/drawingml/2006/main" xmlns:p="http://schemas.openxmlformats.org/presentationml/2006/main" xmlns:r="http://schemas.openxmlformats.org/officeDocument/2006/relationships">
   <p:cSld>
     <p:bg>

--- a/thesis/abs/slide-bao-ve.pptx
+++ b/thesis/abs/slide-bao-ve.pptx
@@ -522,7 +522,7 @@
           <a:lstStyle/>
           <a:p>
             <a:r>
-              <a:t>Chào thầy cô. Em xin trình bày đồ án thực tập chuyên ngành: Xây dựng website giới thiệu và đặt phòng homestay cho Homestay TVH.</a:t>
+              <a:t>Em chào thầy cô. Em là Nguyễn Hồng Quân, lớp DX23TT11. Hôm nay em xin trình bày đồ án thực tập chuyên ngành: Xây dựng website giới thiệu và đặt phòng homestay cho Homestay TVH, dưới sự hướng dẫn của thầy Nguyễn Nhứt Lam.</a:t>
             </a:r>
           </a:p>
         </p:txBody>
@@ -592,7 +592,7 @@
           <a:lstStyle/>
           <a:p>
             <a:r>
-              <a:t>Ràng buộc loại trừ là thứ MySQL không có. Chỉ số GiST cho phép so sánh chồng lấn — việc mà chỉ số B-tree không làm được. Khi hai giao dịch cùng ghi, PostgreSQL bác một cái, và hệ thống bắt đúng mã lỗi đó rồi thử phòng tiếp theo trong một giao dịch MỚI.</a:t>
+              <a:t>Nên em không kiểm ở tầng ứng dụng nữa, mà đẩy việc quyết định xuống chính cơ sở dữ liệu. Em khai một ràng buộc loại trừ: hai dòng bị coi là xung đột nếu cùng mã phòng và hai khoảng ngày chồng lấn nhau. Khoảng ngày là một cột sinh tự động kiểu daterange theo quy ước nửa mở em vừa trình bày. Ràng buộc này dùng chỉ số GiST, vì chỉ số B-tree thông thường không so sánh được quan hệ chồng lấn. Khi hai giao dịch cùng ghi, PostgreSQL bác một giao dịch ngay trong động cơ lưu trữ bằng mã lỗi 23P01, không còn khe hở nào để chen vào. Hệ thống bắt đúng mã lỗi đó rồi tự thử phòng trống tiếp theo trong một giao dịch mới, nên khách thứ hai vẫn đặt được nếu loại phòng còn phòng khác.</a:t>
             </a:r>
           </a:p>
         </p:txBody>
@@ -662,7 +662,7 @@
           <a:lstStyle/>
           <a:p>
             <a:r>
-              <a:t>Đây là nhóm bảng đặt phòng — nơi đặt ràng buộc quan trọng nhất. Lược đồ do công cụ migration quản lý, và migration là bất biến: đã chạy thì không sửa, chỉ thêm bản mới.</a:t>
+              <a:t>Lược đồ có 21 bảng nghiệp vụ, dựng bởi chín migration. Hình trên slide là nhóm bảng đặt phòng — nơi đặt ràng buộc em vừa nói. Hai điểm em muốn nêu: thứ nhất, lược đồ do công cụ migration quản lý chứ không để khung ứng dụng tự sinh, và migration là bất biến — đã chạy thì không sửa, chỉ thêm bản mới. Thứ hai, dữ liệu mẫu nằm ngoài lịch sử migration, nên bản triển khai thật và bản trình diễn dùng chung một lược đồ mà không lẫn dữ liệu.</a:t>
             </a:r>
           </a:p>
         </p:txBody>
@@ -732,7 +732,7 @@
           <a:lstStyle/>
           <a:p>
             <a:r>
-              <a:t>Tám trạng thái. Hai đường đáng chú ý: đơn đã huỷ và đơn đã hết hạn vẫn quay lại được trạng thái chờ đối soát, khi tiền của khách về muộn. Không có nhánh nào để tiền biến mất im lặng.</a:t>
+              <a:t>Đơn đặt phòng đi qua tám trạng thái. Em xin lưu ý hai đường chuyển ở phía dưới hình: đơn đã huỷ và đơn đã hết hạn vẫn quay lại được trạng thái chờ đối soát. Đó là trường hợp tiền của khách về muộn — khách chuyển khoản chậm, đơn đã hết hạn giữ chỗ, nhưng tiền thì vẫn vào tài khoản thật. Nếu không có hai đường này thì tiền đã vào mà hệ thống coi như không có gì xảy ra. Em thiết kế sao cho không có nhánh nào để tiền của khách biến mất im lặng.</a:t>
             </a:r>
           </a:p>
         </p:txBody>
@@ -802,7 +802,7 @@
           <a:lstStyle/>
           <a:p>
             <a:r>
-              <a:t>Khách quét mã QR chuyển khoản. Nhà cung cấp gọi webhook. Hệ thống kiểm năm lớp trước khi cho phép một đồng nào ảnh hưởng tới dữ liệu: khoá xác thực, số tài khoản, chiều tiền, chống xử lý trùng, và số tiền.</a:t>
+              <a:t>Luồng thanh toán như sau. Sau khi đặt, khách thấy mã QR theo chuẩn VietQR đã gắn sẵn số tiền và nội dung chuyển khoản, kèm đồng hồ đếm ngược mười lăm phút giữ chỗ. Khách quét và chuyển khoản; nhà cung cấp dịch vụ gọi webhook báo về cho hệ thống; hệ thống tự xác nhận đơn và gửi thư cho khách. Màn hình của khách tự chuyển khi tiền về, khách không phải bấm gì thêm. Điểm em muốn nhấn: trước khi cho một đồng nào ảnh hưởng tới dữ liệu, hệ thống kiểm năm lớp — khoá xác thực của webhook, đúng số tài khoản nhận, đúng chiều tiền vào, chống xử lý trùng một giao dịch, và cuối cùng là đúng số tiền.</a:t>
             </a:r>
           </a:p>
         </p:txBody>
@@ -872,7 +872,7 @@
           <a:lstStyle/>
           <a:p>
             <a:r>
-              <a:t>Ba bước: chọn ngày, chọn phòng, xác nhận. Giá hiển thị là tổng cả kỳ chứ không phải giá một đêm — đây là điều khách thực sự muốn biết. Ngày đã hết phòng bị chặn ngay trong lịch, không để khách chọn rồi mới báo lỗi.</a:t>
+              <a:t>Phía khách, luồng đặt phòng gọn trong ba bước: chọn ngày và số khách, chọn phòng, rồi xác nhận. Hai chi tiết nhỏ nhưng em cho là quan trọng. Thứ nhất, giá hiển thị là tổng tiền cả kỳ chứ không phải giá một đêm — đó mới là con số khách thực sự muốn biết trước khi quyết định. Thứ hai, những ngày đã kín phòng bị chặn sẵn ngay trong lịch, khách không chọn được; hệ thống không để khách điền xong hết thông tin rồi mới báo là hết phòng.</a:t>
             </a:r>
           </a:p>
         </p:txBody>
@@ -942,7 +942,7 @@
           <a:lstStyle/>
           <a:p>
             <a:r>
-              <a:t>Trang tổng quan: giá trị booking theo tháng, tỉ lệ lấp đầy, tỉ lệ huỷ, và số khoản tiền đang chờ đối soát. Khu quản trị ưu tiên mật độ thông tin vì chủ homestay dùng nó hằng ngày.</a:t>
+              <a:t>Khu quản trị có mười một màn hình. Trang tổng quan hiện giá trị booking theo tháng, tỉ lệ lấp đầy, tỉ lệ huỷ, và số khoản tiền đang chờ đối soát. Em thiết kế khu này ưu tiên mật độ thông tin chứ không ưu tiên đẹp, vì chủ homestay mở nó hằng ngày và cần nhìn một lần là nắm được tình hình, không phải bấm qua nhiều lớp.</a:t>
             </a:r>
           </a:p>
         </p:txBody>
@@ -1012,7 +1012,7 @@
           <a:lstStyle/>
           <a:p>
             <a:r>
-              <a:t>Kiểm thử tích hợp chạy trên PostgreSQL thật qua Testcontainers, vì ràng buộc loại trừ là tính năng của PostgreSQL — giả lập bằng cơ sở dữ liệu trong bộ nhớ thì đúng thứ cần kiểm lại không tồn tại. Nếu thầy cô hỏi: lần chạy đầy đủ gần nhất xanh 129 ca; bảy ca của lớp kiểm thử nút mô phỏng chuyển khoản bổ sung sau đó em mới kiểm chứng bằng cách gọi trực tiếp qua HTTP, chưa qua một lần chạy đầy đủ cả 136 ca.</a:t>
+              <a:t>Về kiểm chứng, hệ thống có 136 ca kiểm thử trong 19 lớp. Điểm em muốn nói rõ là kiểm thử tích hợp chạy trên PostgreSQL thật qua Testcontainers chứ không giả lập bằng cơ sở dữ liệu trong bộ nhớ — vì thứ cần kiểm chính là hành vi của PostgreSQL: ràng buộc loại trừ, kiểu khoảng, mã trạng thái SQL. Giả lập chúng là kiểm thử một thứ không tồn tại. Trong đó có ba ca kiểm thử đa luồng chứng minh trực tiếp rằng hệ thống không bán trùng phòng. Em cũng xin báo trung thực: lần chạy đầy đủ gần nhất xanh 129 ca; bảy ca của lớp kiểm thử nút mô phỏng chuyển khoản bổ sung sau đó em mới kiểm chứng bằng cách gọi trực tiếp qua HTTP, chưa qua một lần chạy đầy đủ cả 136 ca.</a:t>
             </a:r>
           </a:p>
         </p:txBody>
@@ -1082,7 +1082,7 @@
           <a:lstStyle/>
           <a:p>
             <a:r>
-              <a:t>Bảng trên slide là kết quả quét thật, không phải con số em tự ghi: mỗi dòng là một màn hình, cột giữa là số vi phạm. Quét ngay trên bản đóng gói đang chạy, đi qua đúng máy chủ web và đúng chính sách bảo mật nội dung của bản triển khai.</a:t>
+              <a:t>Bảng trên slide là kết quả quét thật chứ không phải con số em tự ghi: mỗi dòng là một màn hình, cột giữa là số vi phạm. Em quét tự động bằng axe-core trên mười bảy màn hình, bảy màn công khai và mười màn quản trị, và quét ngay trên bản đóng gói đang chạy — tức là đi qua đúng máy chủ web và đúng chính sách bảo mật nội dung của bản triển khai, chứ không phải chạy trên máy phát triển. Kết quả không còn lỗi vi phạm nào ở mức A và AA, trên tổng 353 lần quy tắc đạt. Về triển khai, toàn hệ thống chạy được bằng ba lệnh, và cả bốn dịch vụ đều báo trạng thái khoẻ.</a:t>
             </a:r>
           </a:p>
         </p:txBody>
@@ -1152,7 +1152,7 @@
           <a:lstStyle/>
           <a:p>
             <a:r>
-              <a:t>Em nêu rõ giới hạn thay vì giấu. Ba giới hạn này đều là chỗ mở rộng được, không phải chỗ thiết kế sai.</a:t>
+              <a:t>Em xin nêu rõ giới hạn thay vì giấu đi. Ba giới hạn trên slide là những chỗ em biết hệ thống chưa làm được. Ngoài ra trong báo cáo em liệt kê đủ bảy giới hạn, và em cho rằng giới hạn quan trọng nhất là bản đóng gói hiện chưa có HTTPS, vì nó chạy trên máy cục bộ khi trình diễn — nếu đưa ra dùng thật thì đây là việc phải làm đầu tiên. Điểm chung của những giới hạn này là chúng đều là chỗ mở rộng được, không phải chỗ thiết kế sai.</a:t>
             </a:r>
           </a:p>
         </p:txBody>
@@ -1222,7 +1222,7 @@
           <a:lstStyle/>
           <a:p>
             <a:r>
-              <a:t>Kiến trúc tách rời cho phép ứng dụng di động dùng lại nguyên giao diện lập trình ứng dụng hiện có, không phải viết lại tầng máy chủ.</a:t>
+              <a:t>Ba hướng phát triển tiếp theo. Bảng giá theo mùa là thứ cần nhất về nghiệp vụ, vì giá cuối tuần và giá lễ khác hẳn ngày thường. Về ứng dụng di động, chính vì em tách rời giao diện và máy chủ ngay từ đầu nên ứng dụng di động dùng lại được nguyên giao diện lập trình ứng dụng hiện có, không phải viết lại tầng máy chủ. Hướng thứ ba là đồng bộ lịch hai chiều với sàn trung gian, để chủ nhà vẫn bán trên sàn mà không lo trùng lịch.</a:t>
             </a:r>
           </a:p>
         </p:txBody>
@@ -1292,7 +1292,7 @@
           <a:lstStyle/>
           <a:p>
             <a:r>
-              <a:t>Phần trình bày gồm năm mục. Em sẽ dành nhiều thời gian nhất cho mục hai — vấn đề kỹ thuật then chốt của đề tài.</a:t>
+              <a:t>Phần trình bày của em gồm năm mục. Em xin phép dành nhiều thời gian nhất cho mục thứ hai — vấn đề kỹ thuật then chốt — vì đó là chỗ em đầu tư công sức nhiều nhất và cũng là chỗ em nghĩ có giá trị nhất của đề tài. Ba mục còn lại em sẽ đi nhanh hơn.</a:t>
             </a:r>
           </a:p>
         </p:txBody>
@@ -1362,7 +1362,7 @@
           <a:lstStyle/>
           <a:p>
             <a:r>
-              <a:t>Slide này để hội đồng mở lại bất cứ lúc nào: video thuyết trình, kho mã nguồn và bản trình diễn hệ thống. Kho mã nguồn để công khai nên thầy cô mở được ngay, không cần xin quyền.</a:t>
+              <a:t>Slide này để thầy cô mở lại bất cứ lúc nào: video thuyết trình, kho mã nguồn và bản trình diễn hệ thống dài mười phút đi hết toàn bộ quy trình. Kho mã nguồn em để công khai nên thầy cô mở được ngay, không cần xin quyền truy cập.</a:t>
             </a:r>
           </a:p>
         </p:txBody>
@@ -1432,7 +1432,7 @@
           <a:lstStyle/>
           <a:p>
             <a:r>
-              <a:t>Em xin cảm ơn thầy cô đã lắng nghe. Em sẵn sàng trả lời câu hỏi.</a:t>
+              <a:t>Phần trình bày của em đến đây là hết. Em xin cảm ơn thầy cô đã lắng nghe, và em sẵn sàng trả lời câu hỏi của thầy cô.</a:t>
             </a:r>
           </a:p>
         </p:txBody>
@@ -1502,7 +1502,7 @@
           <a:lstStyle/>
           <a:p>
             <a:r>
-              <a:t>Chủ homestay nhận đặt phòng qua nhiều kênh. Mỗi kênh là một danh sách riêng trong trí nhớ. Ba điểm tô đỏ trên lưu đồ là ba chỗ hỏng: tra cứu bằng trí nhớ, không có bản ghi tập trung, và hai khách nhắn cùng lúc.</a:t>
+              <a:t>Du lịch homestay ở Trà Vinh đang phát triển, nhưng phần lớn cơ sở là hộ gia đình tự vận hành. Chủ nhà nhận đặt phòng qua nhiều kênh tin nhắn khác nhau, mỗi kênh là một danh sách riêng nằm trong trí nhớ. Lưu đồ trên slide là quy trình thủ công hiện nay, và ba ô tô đỏ là ba chỗ hỏng: tra cứu lịch bằng trí nhớ, không có bản ghi tập trung nên mất sổ là mất hết, và nguy hiểm nhất là hai khách nhắn gần như cùng lúc thì đều được trả lời là còn phòng. Còn nếu đưa lên sàn trung gian thì mất 15 đến 20 phần trăm mỗi đơn.</a:t>
             </a:r>
           </a:p>
         </p:txBody>
@@ -1572,7 +1572,7 @@
           <a:lstStyle/>
           <a:p>
             <a:r>
-              <a:t>Đây không phải lỗi bất cẩn. Đây là hệ quả tất yếu của việc quản lý lịch phòng bằng trí nhớ con người. Và đây chính là bài toán kỹ thuật mà đồ án tập trung giải.</a:t>
+              <a:t>Em muốn dừng lại ở rủi ro thứ ba, vì nó mới là bài toán kỹ thuật thật sự. Đây không phải lỗi bất cẩn của chủ nhà. Đây là hệ quả tất yếu của việc quản lý lịch phòng bằng trí nhớ con người: giữa lúc nhìn vào sổ và lúc ghi vào sổ luôn có một khoảng trống thời gian, và trong khoảng đó người thứ hai chen vào được. Hậu quả thì chỉ lộ ra vào ngày nhận phòng, khi khách đã tới nơi — lúc đó không còn cách nào sửa.</a:t>
             </a:r>
           </a:p>
         </p:txBody>
@@ -1642,7 +1642,7 @@
           <a:lstStyle/>
           <a:p>
             <a:r>
-              <a:t>Trước khi nói chuyện chống trùng, phải thống nhất thế nào là trùng. Hai thanh trên hình chạm nhau tại ngày 10 tháng 3 nhưng không chồng lấn — khách này trả phòng buổi sáng, khách kia nhận phòng buổi chiều.</a:t>
+              <a:t>Trước khi nói chuyện chống đặt trùng, phải thống nhất với nhau thế nào là trùng. Hai thanh trên hình chạm nhau tại ngày mùng mười tháng ba, nhưng chúng không chồng lấn: khách thứ nhất trả phòng buổi sáng, khách thứ hai nhận phòng buổi chiều, cùng một ngày mà vẫn bán được cho cả hai. Em dùng quy ước nửa mở, viết là ngoặc vuông mở ngoặc tròn đóng, nghĩa là chứa ngày nhận nhưng không chứa ngày trả. Nếu làm sai quy ước này thì mỗi phòng mất một đêm bán được ở mỗi lượt khách — một lỗi nhỏ trên giấy nhưng rất tốn tiền.</a:t>
             </a:r>
           </a:p>
         </p:txBody>
@@ -1712,7 +1712,7 @@
           <a:lstStyle/>
           <a:p>
             <a:r>
-              <a:t>Tám mục đích cụ thể, mỗi mục đích đi kèm một tiêu chí nghiệm thu đo được, không phải một lời hứa.</a:t>
+              <a:t>Từ bài toán đó, đồ án đặt ra tám mục đích cụ thể, và điều em cố giữ là mỗi mục đích phải đi kèm một tiêu chí nghiệm thu đo được bằng lệnh, chứ không phải một lời hứa. Hệ thống gồm ba khối: trang bán hàng cho khách, khu quản trị cho chủ homestay, và giao diện lập trình ứng dụng nối hai khối đó. Khách đặt cọc bằng mã QR và hệ thống tự xác nhận khi tiền về.</a:t>
             </a:r>
           </a:p>
         </p:txBody>
@@ -1782,7 +1782,7 @@
           <a:lstStyle/>
           <a:p>
             <a:r>
-              <a:t>Em chọn PostgreSQL không phải vì nó mạnh hơn MySQL. Slide sau sẽ nói rõ lý do.</a:t>
+              <a:t>Về công nghệ, em dùng Java 21 với Spring Boot cho tầng máy chủ, Angular 21 cho tầng giao diện, và đóng gói bằng Docker Compose. Em xin nhấn mạnh dòng thứ ba: em chọn PostgreSQL không phải vì nó mạnh hơn MySQL một cách chung chung, mà vì một tính năng rất cụ thể mà MySQL không có. Hai slide nữa em sẽ nói rõ tính năng đó là gì và vì sao nó quyết định cả đề tài.</a:t>
             </a:r>
           </a:p>
         </p:txBody>
@@ -1852,7 +1852,7 @@
           <a:lstStyle/>
           <a:p>
             <a:r>
-              <a:t>Bốn dịch vụ. Máy chủ web là đường vào duy nhất. Cơ sở dữ liệu và hộp thư không mở cổng ra ngoài — chỉ máy chủ ứng dụng gọi tới được.</a:t>
+              <a:t>Hệ thống chạy bốn dịch vụ. Máy chủ web là đường vào duy nhất từ bên ngoài; nó phục vụ tệp tĩnh của giao diện và chuyển tiếp các lời gọi vào máy chủ ứng dụng. Cơ sở dữ liệu và hộp thư không mở cổng ra ngoài — chỉ máy chủ ứng dụng gọi tới được. Cách chia này nghĩa là dù ai đó dò được địa chỉ máy, họ cũng không chạm thẳng vào cơ sở dữ liệu, và mọi yêu cầu đều đi qua đúng một cửa có kiểm soát.</a:t>
             </a:r>
           </a:p>
         </p:txBody>
@@ -1922,7 +1922,7 @@
           <a:lstStyle/>
           <a:p>
             <a:r>
-              <a:t>Đây là slide quan trọng nhất. Cột trái là mẫu kiểm-tra-rồi-ghi: hai luồng cùng đọc thấy còn phòng, cùng ghi, kết quả bán trùng. Khoảng trống giữa lúc đọc và lúc ghi là khe hở không bịt được bằng logic thông thường.</a:t>
+              <a:t>Đây là slide quan trọng nhất của bài. Cách làm tự nhiên nhất khi gặp bài toán này là viết mã kiểm tra: trước khi ghi đơn thì truy vấn xem phòng còn trống không, còn thì mới ghi. Cột bên trái cho thấy vì sao cách đó sai. Hai luồng chạy song song, cả hai cùng đọc và cùng thấy còn phòng, rồi cả hai cùng ghi — kết quả là bán trùng. Khoảng trống giữa lúc đọc và lúc ghi là một khe hở không bịt được bằng logic thông thường. Và điều đáng nói là mức cô lập giao dịch mặc định của PostgreSQL, Read Committed, cũng không ngăn được chuyện này — chính tài liệu của PostgreSQL nêu ví dụ đúng như vậy, và khuyến cáo dùng ràng buộc toàn vẹn thay vì kiểm tra ở tầng ứng dụng.</a:t>
             </a:r>
           </a:p>
         </p:txBody>

--- a/thesis/abs/slide-bao-ve.pptx
+++ b/thesis/abs/slide-bao-ve.pptx
@@ -26,6 +26,13 @@
     <p:sldId id="274" r:id="rId26"/>
     <p:sldId id="275" r:id="rId27"/>
     <p:sldId id="276" r:id="rId28"/>
+    <p:sldId id="277" r:id="rId29"/>
+    <p:sldId id="278" r:id="rId30"/>
+    <p:sldId id="279" r:id="rId31"/>
+    <p:sldId id="280" r:id="rId32"/>
+    <p:sldId id="281" r:id="rId33"/>
+    <p:sldId id="282" r:id="rId34"/>
+    <p:sldId id="283" r:id="rId35"/>
   </p:sldIdLst>
   <p:sldSz cx="12193200" cy="6858000" type="screen4x3"/>
   <p:notesSz cx="6858000" cy="9144000"/>
@@ -592,7 +599,7 @@
           <a:lstStyle/>
           <a:p>
             <a:r>
-              <a:t>Nên em không kiểm ở tầng ứng dụng nữa, mà đẩy việc quyết định xuống chính cơ sở dữ liệu. Em khai một ràng buộc loại trừ: hai dòng bị coi là xung đột nếu cùng mã phòng và hai khoảng ngày chồng lấn nhau. Khoảng ngày là một cột sinh tự động kiểu daterange theo quy ước nửa mở em vừa trình bày. Ràng buộc này dùng chỉ số GiST, vì chỉ số B-tree thông thường không so sánh được quan hệ chồng lấn. Khi hai giao dịch cùng ghi, PostgreSQL bác một giao dịch ngay trong động cơ lưu trữ bằng mã lỗi 23P01, không còn khe hở nào để chen vào. Hệ thống bắt đúng mã lỗi đó rồi tự thử phòng trống tiếp theo trong một giao dịch mới, nên khách thứ hai vẫn đặt được nếu loại phòng còn phòng khác.</a:t>
+              <a:t>Hệ thống chạy bốn dịch vụ. Máy chủ web là đường vào duy nhất từ bên ngoài; nó phục vụ tệp tĩnh của giao diện và chuyển tiếp các lời gọi vào máy chủ ứng dụng. Cơ sở dữ liệu và hộp thư không mở cổng ra ngoài — chỉ máy chủ ứng dụng gọi tới được. Cách chia này nghĩa là dù ai đó dò được địa chỉ máy, họ cũng không chạm thẳng vào cơ sở dữ liệu, và mọi yêu cầu đều đi qua đúng một cửa có kiểm soát.</a:t>
             </a:r>
           </a:p>
         </p:txBody>
@@ -662,7 +669,7 @@
           <a:lstStyle/>
           <a:p>
             <a:r>
-              <a:t>Lược đồ có 21 bảng nghiệp vụ, dựng bởi chín migration. Hình trên slide là nhóm bảng đặt phòng — nơi đặt ràng buộc em vừa nói. Hai điểm em muốn nêu: thứ nhất, lược đồ do công cụ migration quản lý chứ không để khung ứng dụng tự sinh, và migration là bất biến — đã chạy thì không sửa, chỉ thêm bản mới. Thứ hai, dữ liệu mẫu nằm ngoài lịch sử migration, nên bản triển khai thật và bản trình diễn dùng chung một lược đồ mà không lẫn dữ liệu.</a:t>
+              <a:t>Đây là slide quan trọng nhất của bài. Cách làm tự nhiên nhất khi gặp bài toán này là viết mã kiểm tra: trước khi ghi đơn thì truy vấn xem phòng còn trống không, còn thì mới ghi. Cột bên trái cho thấy vì sao cách đó sai. Hai luồng chạy song song, cả hai cùng đọc và cùng thấy còn phòng, rồi cả hai cùng ghi — kết quả là bán trùng. Khoảng trống giữa lúc đọc và lúc ghi là một khe hở không bịt được bằng logic thông thường. Và điều đáng nói là mức cô lập giao dịch mặc định của PostgreSQL, Read Committed, cũng không ngăn được chuyện này — chính tài liệu của PostgreSQL nêu ví dụ đúng như vậy, và khuyến cáo dùng ràng buộc toàn vẹn thay vì kiểm tra ở tầng ứng dụng.</a:t>
             </a:r>
           </a:p>
         </p:txBody>
@@ -732,7 +739,7 @@
           <a:lstStyle/>
           <a:p>
             <a:r>
-              <a:t>Đơn đặt phòng đi qua tám trạng thái. Em xin lưu ý hai đường chuyển ở phía dưới hình: đơn đã huỷ và đơn đã hết hạn vẫn quay lại được trạng thái chờ đối soát. Đó là trường hợp tiền của khách về muộn — khách chuyển khoản chậm, đơn đã hết hạn giữ chỗ, nhưng tiền thì vẫn vào tài khoản thật. Nếu không có hai đường này thì tiền đã vào mà hệ thống coi như không có gì xảy ra. Em thiết kế sao cho không có nhánh nào để tiền của khách biến mất im lặng.</a:t>
+              <a:t>Nên em không kiểm ở tầng ứng dụng nữa, mà đẩy việc quyết định xuống chính cơ sở dữ liệu. Em khai một ràng buộc loại trừ: hai dòng bị coi là xung đột nếu cùng mã phòng và hai khoảng ngày chồng lấn nhau. Khoảng ngày là một cột sinh tự động kiểu daterange theo quy ước nửa mở em vừa trình bày. Ràng buộc này dùng chỉ số GiST, vì chỉ số B-tree thông thường không so sánh được quan hệ chồng lấn. Khi hai giao dịch cùng ghi, PostgreSQL bác một giao dịch ngay trong động cơ lưu trữ bằng mã lỗi 23P01, không còn khe hở nào để chen vào. Hệ thống bắt đúng mã lỗi đó rồi tự thử phòng trống tiếp theo trong một giao dịch mới, nên khách thứ hai vẫn đặt được nếu loại phòng còn phòng khác.</a:t>
             </a:r>
           </a:p>
         </p:txBody>
@@ -802,7 +809,7 @@
           <a:lstStyle/>
           <a:p>
             <a:r>
-              <a:t>Luồng thanh toán như sau. Sau khi đặt, khách thấy mã QR theo chuẩn VietQR đã gắn sẵn số tiền và nội dung chuyển khoản, kèm đồng hồ đếm ngược mười lăm phút giữ chỗ. Khách quét và chuyển khoản; nhà cung cấp dịch vụ gọi webhook báo về cho hệ thống; hệ thống tự xác nhận đơn và gửi thư cho khách. Màn hình của khách tự chuyển khi tiền về, khách không phải bấm gì thêm. Điểm em muốn nhấn: trước khi cho một đồng nào ảnh hưởng tới dữ liệu, hệ thống kiểm năm lớp — khoá xác thực của webhook, đúng số tài khoản nhận, đúng chiều tiền vào, chống xử lý trùng một giao dịch, và cuối cùng là đúng số tiền.</a:t>
+              <a:t>Lược đồ có 21 bảng nghiệp vụ, dựng bởi chín migration. Hình trên slide là nhóm bảng đặt phòng — nơi đặt ràng buộc em vừa nói. Hai điểm em muốn nêu: thứ nhất, lược đồ do công cụ migration quản lý chứ không để khung ứng dụng tự sinh, và migration là bất biến — đã chạy thì không sửa, chỉ thêm bản mới. Thứ hai, dữ liệu mẫu nằm ngoài lịch sử migration, nên bản triển khai thật và bản trình diễn dùng chung một lược đồ mà không lẫn dữ liệu.</a:t>
             </a:r>
           </a:p>
         </p:txBody>
@@ -872,7 +879,7 @@
           <a:lstStyle/>
           <a:p>
             <a:r>
-              <a:t>Phía khách, luồng đặt phòng gọn trong ba bước: chọn ngày và số khách, chọn phòng, rồi xác nhận. Hai chi tiết nhỏ nhưng em cho là quan trọng. Thứ nhất, giá hiển thị là tổng tiền cả kỳ chứ không phải giá một đêm — đó mới là con số khách thực sự muốn biết trước khi quyết định. Thứ hai, những ngày đã kín phòng bị chặn sẵn ngay trong lịch, khách không chọn được; hệ thống không để khách điền xong hết thông tin rồi mới báo là hết phòng.</a:t>
+              <a:t>Đây là lược đồ tổng thể, hai mươi thực thể ánh xạ tới hai mươi trong hai mươi mốt bảng. Em chia thành các nhóm: nhóm phòng và tiện nghi, nhóm đơn đặt phòng, nhóm thanh toán, nhóm nội dung trang chủ, và nhóm người dùng. Thiết kế theo hướng mỗi nhóm có một bảng gốc và các bảng phụ trỏ về, nên thêm một loại tiện nghi hay một kiểu nội dung mới là thêm dòng chứ không phải sửa bảng.</a:t>
             </a:r>
           </a:p>
         </p:txBody>
@@ -942,7 +949,7 @@
           <a:lstStyle/>
           <a:p>
             <a:r>
-              <a:t>Khu quản trị có mười một màn hình. Trang tổng quan hiện giá trị booking theo tháng, tỉ lệ lấp đầy, tỉ lệ huỷ, và số khoản tiền đang chờ đối soát. Em thiết kế khu này ưu tiên mật độ thông tin chứ không ưu tiên đẹp, vì chủ homestay mở nó hằng ngày và cần nhìn một lần là nắm được tình hình, không phải bấm qua nhiều lớp.</a:t>
+              <a:t>Đơn đặt phòng đi qua tám trạng thái. Em xin lưu ý hai đường chuyển ở phía dưới hình: đơn đã huỷ và đơn đã hết hạn vẫn quay lại được trạng thái chờ đối soát. Đó là trường hợp tiền của khách về muộn — khách chuyển khoản chậm, đơn đã hết hạn giữ chỗ, nhưng tiền thì vẫn vào tài khoản thật. Nếu không có hai đường này thì tiền đã vào mà hệ thống coi như không có gì xảy ra. Em thiết kế sao cho không có nhánh nào để tiền của khách biến mất im lặng.</a:t>
             </a:r>
           </a:p>
         </p:txBody>
@@ -1012,7 +1019,7 @@
           <a:lstStyle/>
           <a:p>
             <a:r>
-              <a:t>Về kiểm chứng, hệ thống có 136 ca kiểm thử trong 19 lớp. Điểm em muốn nói rõ là kiểm thử tích hợp chạy trên PostgreSQL thật qua Testcontainers chứ không giả lập bằng cơ sở dữ liệu trong bộ nhớ — vì thứ cần kiểm chính là hành vi của PostgreSQL: ràng buộc loại trừ, kiểu khoảng, mã trạng thái SQL. Giả lập chúng là kiểm thử một thứ không tồn tại. Trong đó có ba ca kiểm thử đa luồng chứng minh trực tiếp rằng hệ thống không bán trùng phòng. Em cũng xin báo trung thực: lần chạy đầy đủ gần nhất xanh 129 ca; bảy ca của lớp kiểm thử nút mô phỏng chuyển khoản bổ sung sau đó em mới kiểm chứng bằng cách gọi trực tiếp qua HTTP, chưa qua một lần chạy đầy đủ cả 136 ca.</a:t>
+              <a:t>Em muốn dừng ở một nhánh mà em nghĩ là khó nhất trong cả hệ thống. Khách chuyển khoản chậm, đơn đã hết hạn giữ chỗ mười lăm phút, nhưng tiền thì vẫn vào tài khoản thật. Nếu xử lý ngây thơ thì hệ thống sẽ bỏ qua webhook vì đơn không còn hiệu lực, và tiền của khách biến mất im lặng — khách mất tiền mà không có phòng. Sơ đồ này là cách em xử lý: webhook về muộn vẫn được ghi nhận, đơn quay lại trạng thái chờ đối soát, và chủ nhà thấy nó trên màn hình đối soát để quyết định hoàn tiền hay xếp phòng khác.</a:t>
             </a:r>
           </a:p>
         </p:txBody>
@@ -1082,7 +1089,7 @@
           <a:lstStyle/>
           <a:p>
             <a:r>
-              <a:t>Bảng trên slide là kết quả quét thật chứ không phải con số em tự ghi: mỗi dòng là một màn hình, cột giữa là số vi phạm. Em quét tự động bằng axe-core trên mười bảy màn hình, bảy màn công khai và mười màn quản trị, và quét ngay trên bản đóng gói đang chạy — tức là đi qua đúng máy chủ web và đúng chính sách bảo mật nội dung của bản triển khai, chứ không phải chạy trên máy phát triển. Kết quả không còn lỗi vi phạm nào ở mức A và AA, trên tổng 353 lần quy tắc đạt. Về triển khai, toàn hệ thống chạy được bằng ba lệnh, và cả bốn dịch vụ đều báo trạng thái khoẻ.</a:t>
+              <a:t>Luồng thanh toán như sau. Sau khi đặt, khách thấy mã QR theo chuẩn VietQR đã gắn sẵn số tiền và nội dung chuyển khoản, kèm đồng hồ đếm ngược mười lăm phút giữ chỗ. Khách quét và chuyển khoản; nhà cung cấp dịch vụ gọi webhook báo về cho hệ thống; hệ thống tự xác nhận đơn và gửi thư cho khách. Màn hình của khách tự chuyển khi tiền về, khách không phải bấm gì thêm. Điểm em muốn nhấn: trước khi cho một đồng nào ảnh hưởng tới dữ liệu, hệ thống kiểm năm lớp — khoá xác thực của webhook, đúng số tài khoản nhận, đúng chiều tiền vào, chống xử lý trùng một giao dịch, và cuối cùng là đúng số tiền.</a:t>
             </a:r>
           </a:p>
         </p:txBody>
@@ -1152,7 +1159,7 @@
           <a:lstStyle/>
           <a:p>
             <a:r>
-              <a:t>Em xin nêu rõ giới hạn thay vì giấu đi. Ba giới hạn trên slide là những chỗ em biết hệ thống chưa làm được. Ngoài ra trong báo cáo em liệt kê đủ bảy giới hạn, và em cho rằng giới hạn quan trọng nhất là bản đóng gói hiện chưa có HTTPS, vì nó chạy trên máy cục bộ khi trình diễn — nếu đưa ra dùng thật thì đây là việc phải làm đầu tiên. Điểm chung của những giới hạn này là chúng đều là chỗ mở rộng được, không phải chỗ thiết kế sai.</a:t>
+              <a:t>Giao diện lập trình ứng dụng có tám mươi hai thao tác trên sáu mươi lăm đường dẫn, chia bốn nhóm theo quyền. Nguyên tắc em đặt ra là quyền gắn vào nhóm đường dẫn chứ không gắn vào từng thao tác lẻ, vì gắn lẻ thì chỉ cần quên một chỗ là hở. Riêng nhóm webhook tách hẳn ra, dùng khoá riêng chứ không dùng token người dùng, vì người gọi nó là máy chứ không phải người.</a:t>
             </a:r>
           </a:p>
         </p:txBody>
@@ -1222,7 +1229,7 @@
           <a:lstStyle/>
           <a:p>
             <a:r>
-              <a:t>Ba hướng phát triển tiếp theo. Bảng giá theo mùa là thứ cần nhất về nghiệp vụ, vì giá cuối tuần và giá lễ khác hẳn ngày thường. Về ứng dụng di động, chính vì em tách rời giao diện và máy chủ ngay từ đầu nên ứng dụng di động dùng lại được nguyên giao diện lập trình ứng dụng hiện có, không phải viết lại tầng máy chủ. Hướng thứ ba là đồng bộ lịch hai chiều với sàn trung gian, để chủ nhà vẫn bán trên sàn mà không lo trùng lịch.</a:t>
+              <a:t>Về bảo mật, điểm thiết kế quan trọng nhất nằm ở dòng đầu: cấu hình phân quyền của em kết thúc bằng một quy tắc từ chối tất cả. Nghĩa là mặc định mọi đường dẫn đều bị chặn và phải khai tường minh mới mở ra. Nếu sau này em thêm một chức năng mới mà quên khai quyền, nó sẽ bị chặn chứ không bị hở — hệ thống hỏng theo hướng an toàn. Ngoài ra em giới hạn tần suất theo chín khoá khác nhau, và em thử chín kịch bản tấn công ngay trên hệ thống đang chạy: giả mạo địa chỉ, gọi endpoint quản trị bằng token khách, dùng token cũ sau khi đổi mật khẩu, gửi lại webhook, chèn thẻ kịch bản. Tất cả đều bị chặn.</a:t>
             </a:r>
           </a:p>
         </p:txBody>
@@ -1362,7 +1369,7 @@
           <a:lstStyle/>
           <a:p>
             <a:r>
-              <a:t>Slide này để thầy cô mở lại bất cứ lúc nào: video thuyết trình, kho mã nguồn và bản trình diễn hệ thống dài mười phút đi hết toàn bộ quy trình. Kho mã nguồn em để công khai nên thầy cô mở được ngay, không cần xin quyền truy cập.</a:t>
+              <a:t>Phía khách, luồng đặt phòng gọn trong ba bước: chọn ngày và số khách, chọn phòng, rồi xác nhận. Hai chi tiết nhỏ nhưng em cho là quan trọng. Thứ nhất, giá hiển thị là tổng tiền cả kỳ chứ không phải giá một đêm — đó mới là con số khách thực sự muốn biết trước khi quyết định. Thứ hai, những ngày đã kín phòng bị chặn sẵn ngay trong lịch, khách không chọn được; hệ thống không để khách điền xong hết thông tin rồi mới báo là hết phòng.</a:t>
             </a:r>
           </a:p>
         </p:txBody>
@@ -1432,6 +1439,496 @@
           <a:lstStyle/>
           <a:p>
             <a:r>
+              <a:t>Khu quản trị có mười một màn hình. Trang tổng quan hiện giá trị booking theo tháng, tỉ lệ lấp đầy, tỉ lệ huỷ, và số khoản tiền đang chờ đối soát. Em thiết kế khu này ưu tiên mật độ thông tin chứ không ưu tiên đẹp, vì chủ homestay mở nó hằng ngày và cần nhìn một lần là nắm được tình hình, không phải bấm qua nhiều lớp.</a:t>
+            </a:r>
+          </a:p>
+        </p:txBody>
+      </p:sp>
+      <p:sp>
+        <p:nvSpPr>
+          <p:cNvPr id="4" name="Slide Number Placeholder 3"/>
+          <p:cNvSpPr>
+            <a:spLocks noGrp="1"/>
+          </p:cNvSpPr>
+          <p:nvPr>
+            <p:ph type="sldNum" idx="5" sz="quarter"/>
+          </p:nvPr>
+        </p:nvSpPr>
+        <p:spPr/>
+      </p:sp>
+    </p:spTree>
+  </p:cSld>
+  <p:clrMapOvr>
+    <a:masterClrMapping/>
+  </p:clrMapOvr>
+</p:notes>
+</file>
+
+<file path=ppt/notesSlides/notesSlide22.xml><?xml version="1.0" encoding="utf-8"?>
+<p:notes xmlns:a="http://schemas.openxmlformats.org/drawingml/2006/main" xmlns:p="http://schemas.openxmlformats.org/presentationml/2006/main" xmlns:r="http://schemas.openxmlformats.org/officeDocument/2006/relationships">
+  <p:cSld>
+    <p:spTree>
+      <p:nvGrpSpPr>
+        <p:cNvPr id="1" name=""/>
+        <p:cNvGrpSpPr/>
+        <p:nvPr/>
+      </p:nvGrpSpPr>
+      <p:grpSpPr>
+        <a:xfrm>
+          <a:off x="0" y="0"/>
+          <a:ext cx="0" cy="0"/>
+          <a:chOff x="0" y="0"/>
+          <a:chExt cx="0" cy="0"/>
+        </a:xfrm>
+      </p:grpSpPr>
+      <p:sp>
+        <p:nvSpPr>
+          <p:cNvPr id="2" name="Slide Image Placeholder 1"/>
+          <p:cNvSpPr>
+            <a:spLocks noGrp="1"/>
+          </p:cNvSpPr>
+          <p:nvPr>
+            <p:ph type="sldImg" idx="2"/>
+          </p:nvPr>
+        </p:nvSpPr>
+        <p:spPr/>
+      </p:sp>
+      <p:sp>
+        <p:nvSpPr>
+          <p:cNvPr id="3" name="Notes Placeholder 2"/>
+          <p:cNvSpPr>
+            <a:spLocks noGrp="1"/>
+          </p:cNvSpPr>
+          <p:nvPr>
+            <p:ph type="body" idx="3" sz="quarter"/>
+          </p:nvPr>
+        </p:nvSpPr>
+        <p:spPr/>
+        <p:txBody>
+          <a:bodyPr/>
+          <a:lstStyle/>
+          <a:p>
+            <a:r>
+              <a:t>Về kiểm chứng, hệ thống có 136 ca kiểm thử trong 19 lớp. Điểm em muốn nói rõ là kiểm thử tích hợp chạy trên PostgreSQL thật qua Testcontainers chứ không giả lập bằng cơ sở dữ liệu trong bộ nhớ — vì thứ cần kiểm chính là hành vi của PostgreSQL: ràng buộc loại trừ, kiểu khoảng, mã trạng thái SQL. Giả lập chúng là kiểm thử một thứ không tồn tại. Trong đó có ba ca kiểm thử đa luồng chứng minh trực tiếp rằng hệ thống không bán trùng phòng. Em cũng xin báo trung thực: lần chạy đầy đủ gần nhất xanh 129 ca; bảy ca của lớp kiểm thử nút mô phỏng chuyển khoản bổ sung sau đó em mới kiểm chứng bằng cách gọi trực tiếp qua HTTP, chưa qua một lần chạy đầy đủ cả 136 ca.</a:t>
+            </a:r>
+          </a:p>
+        </p:txBody>
+      </p:sp>
+      <p:sp>
+        <p:nvSpPr>
+          <p:cNvPr id="4" name="Slide Number Placeholder 3"/>
+          <p:cNvSpPr>
+            <a:spLocks noGrp="1"/>
+          </p:cNvSpPr>
+          <p:nvPr>
+            <p:ph type="sldNum" idx="5" sz="quarter"/>
+          </p:nvPr>
+        </p:nvSpPr>
+        <p:spPr/>
+      </p:sp>
+    </p:spTree>
+  </p:cSld>
+  <p:clrMapOvr>
+    <a:masterClrMapping/>
+  </p:clrMapOvr>
+</p:notes>
+</file>
+
+<file path=ppt/notesSlides/notesSlide23.xml><?xml version="1.0" encoding="utf-8"?>
+<p:notes xmlns:a="http://schemas.openxmlformats.org/drawingml/2006/main" xmlns:p="http://schemas.openxmlformats.org/presentationml/2006/main" xmlns:r="http://schemas.openxmlformats.org/officeDocument/2006/relationships">
+  <p:cSld>
+    <p:spTree>
+      <p:nvGrpSpPr>
+        <p:cNvPr id="1" name=""/>
+        <p:cNvGrpSpPr/>
+        <p:nvPr/>
+      </p:nvGrpSpPr>
+      <p:grpSpPr>
+        <a:xfrm>
+          <a:off x="0" y="0"/>
+          <a:ext cx="0" cy="0"/>
+          <a:chOff x="0" y="0"/>
+          <a:chExt cx="0" cy="0"/>
+        </a:xfrm>
+      </p:grpSpPr>
+      <p:sp>
+        <p:nvSpPr>
+          <p:cNvPr id="2" name="Slide Image Placeholder 1"/>
+          <p:cNvSpPr>
+            <a:spLocks noGrp="1"/>
+          </p:cNvSpPr>
+          <p:nvPr>
+            <p:ph type="sldImg" idx="2"/>
+          </p:nvPr>
+        </p:nvSpPr>
+        <p:spPr/>
+      </p:sp>
+      <p:sp>
+        <p:nvSpPr>
+          <p:cNvPr id="3" name="Notes Placeholder 2"/>
+          <p:cNvSpPr>
+            <a:spLocks noGrp="1"/>
+          </p:cNvSpPr>
+          <p:nvPr>
+            <p:ph type="body" idx="3" sz="quarter"/>
+          </p:nvPr>
+        </p:nvSpPr>
+        <p:spPr/>
+        <p:txBody>
+          <a:bodyPr/>
+          <a:lstStyle/>
+          <a:p>
+            <a:r>
+              <a:t>Em muốn nói một chút về mười một lỗi thực tế, vì em nghĩ chỗ này nói lên nhiều điều hơn là con số ca kiểm thử. Hình trên slide là một trong số đó: nút chính của trang có độ tương phản chỉ 2,27 trên 1, dưới xa ngưỡng 4,5 của chuẩn khả năng tiếp cận, do một quy tắc CSS nằm ngoài tầng. Sau khi sửa thì lên 7,69. Điều đáng nói là lỗi này biên dịch vẫn thành công, kiểm thử vẫn xanh, và chỉ lộ ra khi em chụp màn hình bằng trình duyệt thật. Bài học em rút ra là một màn hình chưa ai thao tác tới là một màn hình chưa được kiểm — và đó là lý do em bổ sung bước chụp ảnh tự động toàn bộ màn hình.</a:t>
+            </a:r>
+          </a:p>
+        </p:txBody>
+      </p:sp>
+      <p:sp>
+        <p:nvSpPr>
+          <p:cNvPr id="4" name="Slide Number Placeholder 3"/>
+          <p:cNvSpPr>
+            <a:spLocks noGrp="1"/>
+          </p:cNvSpPr>
+          <p:nvPr>
+            <p:ph type="sldNum" idx="5" sz="quarter"/>
+          </p:nvPr>
+        </p:nvSpPr>
+        <p:spPr/>
+      </p:sp>
+    </p:spTree>
+  </p:cSld>
+  <p:clrMapOvr>
+    <a:masterClrMapping/>
+  </p:clrMapOvr>
+</p:notes>
+</file>
+
+<file path=ppt/notesSlides/notesSlide24.xml><?xml version="1.0" encoding="utf-8"?>
+<p:notes xmlns:a="http://schemas.openxmlformats.org/drawingml/2006/main" xmlns:p="http://schemas.openxmlformats.org/presentationml/2006/main" xmlns:r="http://schemas.openxmlformats.org/officeDocument/2006/relationships">
+  <p:cSld>
+    <p:spTree>
+      <p:nvGrpSpPr>
+        <p:cNvPr id="1" name=""/>
+        <p:cNvGrpSpPr/>
+        <p:nvPr/>
+      </p:nvGrpSpPr>
+      <p:grpSpPr>
+        <a:xfrm>
+          <a:off x="0" y="0"/>
+          <a:ext cx="0" cy="0"/>
+          <a:chOff x="0" y="0"/>
+          <a:chExt cx="0" cy="0"/>
+        </a:xfrm>
+      </p:grpSpPr>
+      <p:sp>
+        <p:nvSpPr>
+          <p:cNvPr id="2" name="Slide Image Placeholder 1"/>
+          <p:cNvSpPr>
+            <a:spLocks noGrp="1"/>
+          </p:cNvSpPr>
+          <p:nvPr>
+            <p:ph type="sldImg" idx="2"/>
+          </p:nvPr>
+        </p:nvSpPr>
+        <p:spPr/>
+      </p:sp>
+      <p:sp>
+        <p:nvSpPr>
+          <p:cNvPr id="3" name="Notes Placeholder 2"/>
+          <p:cNvSpPr>
+            <a:spLocks noGrp="1"/>
+          </p:cNvSpPr>
+          <p:nvPr>
+            <p:ph type="body" idx="3" sz="quarter"/>
+          </p:nvPr>
+        </p:nvSpPr>
+        <p:spPr/>
+        <p:txBody>
+          <a:bodyPr/>
+          <a:lstStyle/>
+          <a:p>
+            <a:r>
+              <a:t>Bảng trên slide là kết quả quét thật chứ không phải con số em tự ghi: mỗi dòng là một màn hình, cột giữa là số vi phạm. Em quét tự động bằng axe-core trên mười bảy màn hình, bảy màn công khai và mười màn quản trị, và quét ngay trên bản đóng gói đang chạy — tức là đi qua đúng máy chủ web và đúng chính sách bảo mật nội dung của bản triển khai, chứ không phải chạy trên máy phát triển. Kết quả không còn lỗi vi phạm nào ở mức A và AA, trên tổng 353 lần quy tắc đạt. Về triển khai, toàn hệ thống chạy được bằng ba lệnh, và cả bốn dịch vụ đều báo trạng thái khoẻ.</a:t>
+            </a:r>
+          </a:p>
+        </p:txBody>
+      </p:sp>
+      <p:sp>
+        <p:nvSpPr>
+          <p:cNvPr id="4" name="Slide Number Placeholder 3"/>
+          <p:cNvSpPr>
+            <a:spLocks noGrp="1"/>
+          </p:cNvSpPr>
+          <p:nvPr>
+            <p:ph type="sldNum" idx="5" sz="quarter"/>
+          </p:nvPr>
+        </p:nvSpPr>
+        <p:spPr/>
+      </p:sp>
+    </p:spTree>
+  </p:cSld>
+  <p:clrMapOvr>
+    <a:masterClrMapping/>
+  </p:clrMapOvr>
+</p:notes>
+</file>
+
+<file path=ppt/notesSlides/notesSlide25.xml><?xml version="1.0" encoding="utf-8"?>
+<p:notes xmlns:a="http://schemas.openxmlformats.org/drawingml/2006/main" xmlns:p="http://schemas.openxmlformats.org/presentationml/2006/main" xmlns:r="http://schemas.openxmlformats.org/officeDocument/2006/relationships">
+  <p:cSld>
+    <p:spTree>
+      <p:nvGrpSpPr>
+        <p:cNvPr id="1" name=""/>
+        <p:cNvGrpSpPr/>
+        <p:nvPr/>
+      </p:nvGrpSpPr>
+      <p:grpSpPr>
+        <a:xfrm>
+          <a:off x="0" y="0"/>
+          <a:ext cx="0" cy="0"/>
+          <a:chOff x="0" y="0"/>
+          <a:chExt cx="0" cy="0"/>
+        </a:xfrm>
+      </p:grpSpPr>
+      <p:sp>
+        <p:nvSpPr>
+          <p:cNvPr id="2" name="Slide Image Placeholder 1"/>
+          <p:cNvSpPr>
+            <a:spLocks noGrp="1"/>
+          </p:cNvSpPr>
+          <p:nvPr>
+            <p:ph type="sldImg" idx="2"/>
+          </p:nvPr>
+        </p:nvSpPr>
+        <p:spPr/>
+      </p:sp>
+      <p:sp>
+        <p:nvSpPr>
+          <p:cNvPr id="3" name="Notes Placeholder 2"/>
+          <p:cNvSpPr>
+            <a:spLocks noGrp="1"/>
+          </p:cNvSpPr>
+          <p:nvPr>
+            <p:ph type="body" idx="3" sz="quarter"/>
+          </p:nvPr>
+        </p:nvSpPr>
+        <p:spPr/>
+        <p:txBody>
+          <a:bodyPr/>
+          <a:lstStyle/>
+          <a:p>
+            <a:r>
+              <a:t>Em xin nêu rõ giới hạn thay vì giấu đi. Ba giới hạn trên slide là những chỗ em biết hệ thống chưa làm được. Ngoài ra trong báo cáo em liệt kê đủ bảy giới hạn, và em cho rằng giới hạn quan trọng nhất là bản đóng gói hiện chưa có HTTPS, vì nó chạy trên máy cục bộ khi trình diễn — nếu đưa ra dùng thật thì đây là việc phải làm đầu tiên. Điểm chung của những giới hạn này là chúng đều là chỗ mở rộng được, không phải chỗ thiết kế sai.</a:t>
+            </a:r>
+          </a:p>
+        </p:txBody>
+      </p:sp>
+      <p:sp>
+        <p:nvSpPr>
+          <p:cNvPr id="4" name="Slide Number Placeholder 3"/>
+          <p:cNvSpPr>
+            <a:spLocks noGrp="1"/>
+          </p:cNvSpPr>
+          <p:nvPr>
+            <p:ph type="sldNum" idx="5" sz="quarter"/>
+          </p:nvPr>
+        </p:nvSpPr>
+        <p:spPr/>
+      </p:sp>
+    </p:spTree>
+  </p:cSld>
+  <p:clrMapOvr>
+    <a:masterClrMapping/>
+  </p:clrMapOvr>
+</p:notes>
+</file>
+
+<file path=ppt/notesSlides/notesSlide26.xml><?xml version="1.0" encoding="utf-8"?>
+<p:notes xmlns:a="http://schemas.openxmlformats.org/drawingml/2006/main" xmlns:p="http://schemas.openxmlformats.org/presentationml/2006/main" xmlns:r="http://schemas.openxmlformats.org/officeDocument/2006/relationships">
+  <p:cSld>
+    <p:spTree>
+      <p:nvGrpSpPr>
+        <p:cNvPr id="1" name=""/>
+        <p:cNvGrpSpPr/>
+        <p:nvPr/>
+      </p:nvGrpSpPr>
+      <p:grpSpPr>
+        <a:xfrm>
+          <a:off x="0" y="0"/>
+          <a:ext cx="0" cy="0"/>
+          <a:chOff x="0" y="0"/>
+          <a:chExt cx="0" cy="0"/>
+        </a:xfrm>
+      </p:grpSpPr>
+      <p:sp>
+        <p:nvSpPr>
+          <p:cNvPr id="2" name="Slide Image Placeholder 1"/>
+          <p:cNvSpPr>
+            <a:spLocks noGrp="1"/>
+          </p:cNvSpPr>
+          <p:nvPr>
+            <p:ph type="sldImg" idx="2"/>
+          </p:nvPr>
+        </p:nvSpPr>
+        <p:spPr/>
+      </p:sp>
+      <p:sp>
+        <p:nvSpPr>
+          <p:cNvPr id="3" name="Notes Placeholder 2"/>
+          <p:cNvSpPr>
+            <a:spLocks noGrp="1"/>
+          </p:cNvSpPr>
+          <p:nvPr>
+            <p:ph type="body" idx="3" sz="quarter"/>
+          </p:nvPr>
+        </p:nvSpPr>
+        <p:spPr/>
+        <p:txBody>
+          <a:bodyPr/>
+          <a:lstStyle/>
+          <a:p>
+            <a:r>
+              <a:t>Ba hướng phát triển tiếp theo. Bảng giá theo mùa là thứ cần nhất về nghiệp vụ, vì giá cuối tuần và giá lễ khác hẳn ngày thường. Về ứng dụng di động, chính vì em tách rời giao diện và máy chủ ngay từ đầu nên ứng dụng di động dùng lại được nguyên giao diện lập trình ứng dụng hiện có, không phải viết lại tầng máy chủ. Hướng thứ ba là đồng bộ lịch hai chiều với sàn trung gian, để chủ nhà vẫn bán trên sàn mà không lo trùng lịch.</a:t>
+            </a:r>
+          </a:p>
+        </p:txBody>
+      </p:sp>
+      <p:sp>
+        <p:nvSpPr>
+          <p:cNvPr id="4" name="Slide Number Placeholder 3"/>
+          <p:cNvSpPr>
+            <a:spLocks noGrp="1"/>
+          </p:cNvSpPr>
+          <p:nvPr>
+            <p:ph type="sldNum" idx="5" sz="quarter"/>
+          </p:nvPr>
+        </p:nvSpPr>
+        <p:spPr/>
+      </p:sp>
+    </p:spTree>
+  </p:cSld>
+  <p:clrMapOvr>
+    <a:masterClrMapping/>
+  </p:clrMapOvr>
+</p:notes>
+</file>
+
+<file path=ppt/notesSlides/notesSlide27.xml><?xml version="1.0" encoding="utf-8"?>
+<p:notes xmlns:a="http://schemas.openxmlformats.org/drawingml/2006/main" xmlns:p="http://schemas.openxmlformats.org/presentationml/2006/main" xmlns:r="http://schemas.openxmlformats.org/officeDocument/2006/relationships">
+  <p:cSld>
+    <p:spTree>
+      <p:nvGrpSpPr>
+        <p:cNvPr id="1" name=""/>
+        <p:cNvGrpSpPr/>
+        <p:nvPr/>
+      </p:nvGrpSpPr>
+      <p:grpSpPr>
+        <a:xfrm>
+          <a:off x="0" y="0"/>
+          <a:ext cx="0" cy="0"/>
+          <a:chOff x="0" y="0"/>
+          <a:chExt cx="0" cy="0"/>
+        </a:xfrm>
+      </p:grpSpPr>
+      <p:sp>
+        <p:nvSpPr>
+          <p:cNvPr id="2" name="Slide Image Placeholder 1"/>
+          <p:cNvSpPr>
+            <a:spLocks noGrp="1"/>
+          </p:cNvSpPr>
+          <p:nvPr>
+            <p:ph type="sldImg" idx="2"/>
+          </p:nvPr>
+        </p:nvSpPr>
+        <p:spPr/>
+      </p:sp>
+      <p:sp>
+        <p:nvSpPr>
+          <p:cNvPr id="3" name="Notes Placeholder 2"/>
+          <p:cNvSpPr>
+            <a:spLocks noGrp="1"/>
+          </p:cNvSpPr>
+          <p:nvPr>
+            <p:ph type="body" idx="3" sz="quarter"/>
+          </p:nvPr>
+        </p:nvSpPr>
+        <p:spPr/>
+        <p:txBody>
+          <a:bodyPr/>
+          <a:lstStyle/>
+          <a:p>
+            <a:r>
+              <a:t>Slide này để thầy cô mở lại bất cứ lúc nào: video thuyết trình, kho mã nguồn và bản trình diễn hệ thống dài mười phút đi hết toàn bộ quy trình. Kho mã nguồn em để công khai nên thầy cô mở được ngay, không cần xin quyền truy cập.</a:t>
+            </a:r>
+          </a:p>
+        </p:txBody>
+      </p:sp>
+      <p:sp>
+        <p:nvSpPr>
+          <p:cNvPr id="4" name="Slide Number Placeholder 3"/>
+          <p:cNvSpPr>
+            <a:spLocks noGrp="1"/>
+          </p:cNvSpPr>
+          <p:nvPr>
+            <p:ph type="sldNum" idx="5" sz="quarter"/>
+          </p:nvPr>
+        </p:nvSpPr>
+        <p:spPr/>
+      </p:sp>
+    </p:spTree>
+  </p:cSld>
+  <p:clrMapOvr>
+    <a:masterClrMapping/>
+  </p:clrMapOvr>
+</p:notes>
+</file>
+
+<file path=ppt/notesSlides/notesSlide28.xml><?xml version="1.0" encoding="utf-8"?>
+<p:notes xmlns:a="http://schemas.openxmlformats.org/drawingml/2006/main" xmlns:p="http://schemas.openxmlformats.org/presentationml/2006/main" xmlns:r="http://schemas.openxmlformats.org/officeDocument/2006/relationships">
+  <p:cSld>
+    <p:spTree>
+      <p:nvGrpSpPr>
+        <p:cNvPr id="1" name=""/>
+        <p:cNvGrpSpPr/>
+        <p:nvPr/>
+      </p:nvGrpSpPr>
+      <p:grpSpPr>
+        <a:xfrm>
+          <a:off x="0" y="0"/>
+          <a:ext cx="0" cy="0"/>
+          <a:chOff x="0" y="0"/>
+          <a:chExt cx="0" cy="0"/>
+        </a:xfrm>
+      </p:grpSpPr>
+      <p:sp>
+        <p:nvSpPr>
+          <p:cNvPr id="2" name="Slide Image Placeholder 1"/>
+          <p:cNvSpPr>
+            <a:spLocks noGrp="1"/>
+          </p:cNvSpPr>
+          <p:nvPr>
+            <p:ph type="sldImg" idx="2"/>
+          </p:nvPr>
+        </p:nvSpPr>
+        <p:spPr/>
+      </p:sp>
+      <p:sp>
+        <p:nvSpPr>
+          <p:cNvPr id="3" name="Notes Placeholder 2"/>
+          <p:cNvSpPr>
+            <a:spLocks noGrp="1"/>
+          </p:cNvSpPr>
+          <p:nvPr>
+            <p:ph type="body" idx="3" sz="quarter"/>
+          </p:nvPr>
+        </p:nvSpPr>
+        <p:spPr/>
+        <p:txBody>
+          <a:bodyPr/>
+          <a:lstStyle/>
+          <a:p>
+            <a:r>
               <a:t>Phần trình bày của em đến đây là hết. Em xin cảm ơn thầy cô đã lắng nghe, và em sẵn sàng trả lời câu hỏi của thầy cô.</a:t>
             </a:r>
           </a:p>
@@ -1572,7 +2069,7 @@
           <a:lstStyle/>
           <a:p>
             <a:r>
-              <a:t>Em muốn dừng lại ở rủi ro thứ ba, vì nó mới là bài toán kỹ thuật thật sự. Đây không phải lỗi bất cẩn của chủ nhà. Đây là hệ quả tất yếu của việc quản lý lịch phòng bằng trí nhớ con người: giữa lúc nhìn vào sổ và lúc ghi vào sổ luôn có một khoảng trống thời gian, và trong khoảng đó người thứ hai chen vào được. Hậu quả thì chỉ lộ ra vào ngày nhận phòng, khi khách đã tới nơi — lúc đó không còn cách nào sửa.</a:t>
+              <a:t>Một câu hỏi hợp lý là vì sao không đưa luôn lên Booking hay Agoda cho nhanh. Em có khảo sát và thấy ba vấn đề. Thứ nhất là hoa hồng 15 đến 20 phần trăm mỗi đơn, với một homestay nhỏ thì đó là phần lớn lợi nhuận. Thứ hai, chủ nhà không sở hữu dữ liệu khách của chính mình, nên không xây được tệp khách quen. Thứ ba, và đây mới là điều quan trọng: kể cả bán trên sàn thì chủ nhà vẫn phải giữ một lịch riêng cho khách đặt trực tiếp qua tin nhắn — tức là bài toán trùng lịch vẫn còn nguyên, chỉ là chuyển chỗ.</a:t>
             </a:r>
           </a:p>
         </p:txBody>
@@ -1642,7 +2139,7 @@
           <a:lstStyle/>
           <a:p>
             <a:r>
-              <a:t>Trước khi nói chuyện chống đặt trùng, phải thống nhất với nhau thế nào là trùng. Hai thanh trên hình chạm nhau tại ngày mùng mười tháng ba, nhưng chúng không chồng lấn: khách thứ nhất trả phòng buổi sáng, khách thứ hai nhận phòng buổi chiều, cùng một ngày mà vẫn bán được cho cả hai. Em dùng quy ước nửa mở, viết là ngoặc vuông mở ngoặc tròn đóng, nghĩa là chứa ngày nhận nhưng không chứa ngày trả. Nếu làm sai quy ước này thì mỗi phòng mất một đêm bán được ở mỗi lượt khách — một lỗi nhỏ trên giấy nhưng rất tốn tiền.</a:t>
+              <a:t>Em muốn dừng lại ở rủi ro thứ ba, vì nó mới là bài toán kỹ thuật thật sự. Đây không phải lỗi bất cẩn của chủ nhà. Đây là hệ quả tất yếu của việc quản lý lịch phòng bằng trí nhớ con người: giữa lúc nhìn vào sổ và lúc ghi vào sổ luôn có một khoảng trống thời gian, và trong khoảng đó người thứ hai chen vào được. Hậu quả thì chỉ lộ ra vào ngày nhận phòng, khi khách đã tới nơi — lúc đó không còn cách nào sửa.</a:t>
             </a:r>
           </a:p>
         </p:txBody>
@@ -1712,7 +2209,7 @@
           <a:lstStyle/>
           <a:p>
             <a:r>
-              <a:t>Từ bài toán đó, đồ án đặt ra tám mục đích cụ thể, và điều em cố giữ là mỗi mục đích phải đi kèm một tiêu chí nghiệm thu đo được bằng lệnh, chứ không phải một lời hứa. Hệ thống gồm ba khối: trang bán hàng cho khách, khu quản trị cho chủ homestay, và giao diện lập trình ứng dụng nối hai khối đó. Khách đặt cọc bằng mã QR và hệ thống tự xác nhận khi tiền về.</a:t>
+              <a:t>Trước khi nói chuyện chống đặt trùng, phải thống nhất với nhau thế nào là trùng. Hai thanh trên hình chạm nhau tại ngày mùng mười tháng ba, nhưng chúng không chồng lấn: khách thứ nhất trả phòng buổi sáng, khách thứ hai nhận phòng buổi chiều, cùng một ngày mà vẫn bán được cho cả hai. Em dùng quy ước nửa mở, viết là ngoặc vuông mở ngoặc tròn đóng, nghĩa là chứa ngày nhận nhưng không chứa ngày trả. Nếu làm sai quy ước này thì mỗi phòng mất một đêm bán được ở mỗi lượt khách — một lỗi nhỏ trên giấy nhưng rất tốn tiền.</a:t>
             </a:r>
           </a:p>
         </p:txBody>
@@ -1782,7 +2279,7 @@
           <a:lstStyle/>
           <a:p>
             <a:r>
-              <a:t>Về công nghệ, em dùng Java 21 với Spring Boot cho tầng máy chủ, Angular 21 cho tầng giao diện, và đóng gói bằng Docker Compose. Em xin nhấn mạnh dòng thứ ba: em chọn PostgreSQL không phải vì nó mạnh hơn MySQL một cách chung chung, mà vì một tính năng rất cụ thể mà MySQL không có. Hai slide nữa em sẽ nói rõ tính năng đó là gì và vì sao nó quyết định cả đề tài.</a:t>
+              <a:t>Từ bài toán đó, đồ án đặt ra tám mục đích cụ thể, và điều em cố giữ là mỗi mục đích phải đi kèm một tiêu chí nghiệm thu đo được bằng lệnh, chứ không phải một lời hứa. Hệ thống gồm ba khối: trang bán hàng cho khách, khu quản trị cho chủ homestay, và giao diện lập trình ứng dụng nối hai khối đó. Khách đặt cọc bằng mã QR và hệ thống tự xác nhận khi tiền về.</a:t>
             </a:r>
           </a:p>
         </p:txBody>
@@ -1852,7 +2349,7 @@
           <a:lstStyle/>
           <a:p>
             <a:r>
-              <a:t>Hệ thống chạy bốn dịch vụ. Máy chủ web là đường vào duy nhất từ bên ngoài; nó phục vụ tệp tĩnh của giao diện và chuyển tiếp các lời gọi vào máy chủ ứng dụng. Cơ sở dữ liệu và hộp thư không mở cổng ra ngoài — chỉ máy chủ ứng dụng gọi tới được. Cách chia này nghĩa là dù ai đó dò được địa chỉ máy, họ cũng không chạm thẳng vào cơ sở dữ liệu, và mọi yêu cầu đều đi qua đúng một cửa có kiểm soát.</a:t>
+              <a:t>Về phân tích chức năng, hệ thống có mười một use case và bốn tác nhân. Cột trái là nhóm chức năng của khách: tìm phòng, đặt phòng, thanh toán cọc, tra cứu và huỷ đơn, xem lại đơn đã đặt, viết đánh giá. Cột phải là của quản trị viên: đối soát thanh toán, quản lý đơn, báo cáo doanh thu, đặt ngày khả dụng, soạn nội dung trang chủ. Em xin lưu ý quan hệ kế thừa ở góc trái: khách có tài khoản làm được mọi thao tác của khách vãng lai và chỉ thêm một chức năng là xem lại toàn bộ đơn đã đặt — nên hệ thống không bắt ai phải đăng ký mới đặt được phòng.</a:t>
             </a:r>
           </a:p>
         </p:txBody>
@@ -1922,7 +2419,7 @@
           <a:lstStyle/>
           <a:p>
             <a:r>
-              <a:t>Đây là slide quan trọng nhất của bài. Cách làm tự nhiên nhất khi gặp bài toán này là viết mã kiểm tra: trước khi ghi đơn thì truy vấn xem phòng còn trống không, còn thì mới ghi. Cột bên trái cho thấy vì sao cách đó sai. Hai luồng chạy song song, cả hai cùng đọc và cùng thấy còn phòng, rồi cả hai cùng ghi — kết quả là bán trùng. Khoảng trống giữa lúc đọc và lúc ghi là một khe hở không bịt được bằng logic thông thường. Và điều đáng nói là mức cô lập giao dịch mặc định của PostgreSQL, Read Committed, cũng không ngăn được chuyện này — chính tài liệu của PostgreSQL nêu ví dụ đúng như vậy, và khuyến cáo dùng ràng buộc toàn vẹn thay vì kiểm tra ở tầng ứng dụng.</a:t>
+              <a:t>Về công nghệ, em dùng Java 21 với Spring Boot cho tầng máy chủ, Angular 21 cho tầng giao diện, và đóng gói bằng Docker Compose. Em xin nhấn mạnh dòng thứ ba: em chọn PostgreSQL không phải vì nó mạnh hơn MySQL một cách chung chung, mà vì một tính năng rất cụ thể mà MySQL không có. Hai slide nữa em sẽ nói rõ tính năng đó là gì và vì sao nó quyết định cả đề tài.</a:t>
             </a:r>
           </a:p>
         </p:txBody>
@@ -5180,104 +5677,41 @@
           <a:lstStyle/>
           <a:p>
             <a:r>
-              <a:rPr sz="4000" b="1" i="0">
+              <a:rPr sz="4400" b="1" i="0">
                 <a:solidFill>
                   <a:srgbClr val="0E5C63"/>
                 </a:solidFill>
                 <a:latin typeface="Times New Roman"/>
               </a:rPr>
-              <a:t>Giải pháp: để cơ sở dữ liệu quyết định</a:t>
-            </a:r>
-          </a:p>
-        </p:txBody>
-      </p:sp>
-      <p:sp>
-        <p:nvSpPr>
-          <p:cNvPr id="4" name="TextBox 3"/>
-          <p:cNvSpPr txBox="1"/>
+              <a:t>Kiến trúc tổng thể</a:t>
+            </a:r>
+          </a:p>
+        </p:txBody>
+      </p:sp>
+      <p:pic>
+        <p:nvPicPr>
+          <p:cNvPr id="4" name="Picture 3" descr="hinh-2-1-kien-truc-tong-the.png"/>
+          <p:cNvPicPr>
+            <a:picLocks noChangeAspect="1"/>
+          </p:cNvPicPr>
           <p:nvPr/>
-        </p:nvSpPr>
-        <p:spPr>
-          <a:xfrm>
-            <a:off x="648000" y="1584000"/>
-            <a:ext cx="10897200" cy="4770001"/>
+        </p:nvPicPr>
+        <p:blipFill>
+          <a:blip r:embed="rId2"/>
+          <a:stretch>
+            <a:fillRect/>
+          </a:stretch>
+        </p:blipFill>
+        <p:spPr>
+          <a:xfrm>
+            <a:off x="1080000" y="2858618"/>
+            <a:ext cx="10033200" cy="2220763"/>
           </a:xfrm>
           <a:prstGeom prst="rect">
             <a:avLst/>
           </a:prstGeom>
-          <a:noFill/>
-        </p:spPr>
-        <p:txBody>
-          <a:bodyPr wrap="square" anchor="t">
-            <a:spAutoFit/>
-          </a:bodyPr>
-          <a:lstStyle/>
-          <a:p>
-            <a:pPr marL="324000" indent="-324000">
-              <a:spcAft>
-                <a:spcPts val="1600"/>
-              </a:spcAft>
-            </a:pPr>
-            <a:r>
-              <a:rPr sz="3200" b="0" i="0">
-                <a:solidFill>
-                  <a:srgbClr val="1A1A17"/>
-                </a:solidFill>
-                <a:latin typeface="Times New Roman"/>
-              </a:rPr>
-              <a:t>▪  EXCLUDE USING gist (room_id WITH =, stay WITH &amp;&amp;)</a:t>
-            </a:r>
-          </a:p>
-          <a:p>
-            <a:pPr marL="324000" indent="-324000">
-              <a:spcAft>
-                <a:spcPts val="1600"/>
-              </a:spcAft>
-            </a:pPr>
-            <a:r>
-              <a:rPr sz="3200" b="0" i="0">
-                <a:solidFill>
-                  <a:srgbClr val="1A1A17"/>
-                </a:solidFill>
-                <a:latin typeface="Times New Roman"/>
-              </a:rPr>
-              <a:t>▪  Cột stay sinh tự động: daterange(nhận, trả, '[)')</a:t>
-            </a:r>
-          </a:p>
-          <a:p>
-            <a:pPr marL="324000" indent="-324000">
-              <a:spcAft>
-                <a:spcPts val="1600"/>
-              </a:spcAft>
-            </a:pPr>
-            <a:r>
-              <a:rPr sz="3200" b="0" i="0">
-                <a:solidFill>
-                  <a:srgbClr val="1A1A17"/>
-                </a:solidFill>
-                <a:latin typeface="Times New Roman"/>
-              </a:rPr>
-              <a:t>▪  Luồng thứ hai nhận lỗi 23P01 và bị bác — ngay trong giao dịch</a:t>
-            </a:r>
-          </a:p>
-          <a:p>
-            <a:pPr marL="324000" indent="-324000">
-              <a:spcAft>
-                <a:spcPts val="1600"/>
-              </a:spcAft>
-            </a:pPr>
-            <a:r>
-              <a:rPr sz="3200" b="0" i="0">
-                <a:solidFill>
-                  <a:srgbClr val="1A1A17"/>
-                </a:solidFill>
-                <a:latin typeface="Times New Roman"/>
-              </a:rPr>
-              <a:t>▪  MySQL không có daterange lẫn ràng buộc loại trừ</a:t>
-            </a:r>
-          </a:p>
-        </p:txBody>
-      </p:sp>
+        </p:spPr>
+      </p:pic>
     </p:spTree>
   </p:cSld>
   <p:clrMapOvr>
@@ -5376,14 +5810,101 @@
                 </a:solidFill>
                 <a:latin typeface="Times New Roman"/>
               </a:rPr>
-              <a:t>Cơ sở dữ liệu: 21 bảng, 9 migration</a:t>
+              <a:t>Vì sao kiểm tra ở tầng ứng dụng KHÔNG đủ</a:t>
+            </a:r>
+          </a:p>
+        </p:txBody>
+      </p:sp>
+      <p:sp>
+        <p:nvSpPr>
+          <p:cNvPr id="4" name="TextBox 3"/>
+          <p:cNvSpPr txBox="1"/>
+          <p:nvPr/>
+        </p:nvSpPr>
+        <p:spPr>
+          <a:xfrm>
+            <a:off x="648000" y="1584000"/>
+            <a:ext cx="5220000" cy="4770001"/>
+          </a:xfrm>
+          <a:prstGeom prst="rect">
+            <a:avLst/>
+          </a:prstGeom>
+          <a:noFill/>
+        </p:spPr>
+        <p:txBody>
+          <a:bodyPr wrap="square" anchor="t">
+            <a:spAutoFit/>
+          </a:bodyPr>
+          <a:lstStyle/>
+          <a:p>
+            <a:pPr marL="324000" indent="-324000">
+              <a:spcAft>
+                <a:spcPts val="1600"/>
+              </a:spcAft>
+            </a:pPr>
+            <a:r>
+              <a:rPr sz="2800" b="0" i="0">
+                <a:solidFill>
+                  <a:srgbClr val="1A1A17"/>
+                </a:solidFill>
+                <a:latin typeface="Times New Roman"/>
+              </a:rPr>
+              <a:t>▪  Luồng 1 đọc: còn phòng → Luồng 2 đọc: còn phòng</a:t>
+            </a:r>
+          </a:p>
+          <a:p>
+            <a:pPr marL="324000" indent="-324000">
+              <a:spcAft>
+                <a:spcPts val="1600"/>
+              </a:spcAft>
+            </a:pPr>
+            <a:r>
+              <a:rPr sz="2800" b="0" i="0">
+                <a:solidFill>
+                  <a:srgbClr val="1A1A17"/>
+                </a:solidFill>
+                <a:latin typeface="Times New Roman"/>
+              </a:rPr>
+              <a:t>▪  Cả hai cùng ghi → bán trùng</a:t>
+            </a:r>
+          </a:p>
+          <a:p>
+            <a:pPr marL="324000" indent="-324000">
+              <a:spcAft>
+                <a:spcPts val="1600"/>
+              </a:spcAft>
+            </a:pPr>
+            <a:r>
+              <a:rPr sz="2800" b="0" i="0">
+                <a:solidFill>
+                  <a:srgbClr val="1A1A17"/>
+                </a:solidFill>
+                <a:latin typeface="Times New Roman"/>
+              </a:rPr>
+              <a:t>▪  Mức cô lập Read Committed không ngăn được</a:t>
+            </a:r>
+          </a:p>
+          <a:p>
+            <a:pPr marL="324000" indent="-324000">
+              <a:spcAft>
+                <a:spcPts val="1600"/>
+              </a:spcAft>
+            </a:pPr>
+            <a:r>
+              <a:rPr sz="2800" b="0" i="0">
+                <a:solidFill>
+                  <a:srgbClr val="1A1A17"/>
+                </a:solidFill>
+                <a:latin typeface="Times New Roman"/>
+              </a:rPr>
+              <a:t>▪  Tài liệu PostgreSQL khuyên dùng ràng buộc toàn vẹn</a:t>
             </a:r>
           </a:p>
         </p:txBody>
       </p:sp>
       <p:pic>
         <p:nvPicPr>
-          <p:cNvPr id="4" name="Picture 3" descr="hinh-3-3-erd-dat-phong.png"/>
+          <p:cNvPr id="5" name="Picture 4" descr="hinh-2-2-tranh-chap-dat-phong.png"/>
           <p:cNvPicPr>
             <a:picLocks noChangeAspect="1"/>
           </p:cNvPicPr>
@@ -5397,8 +5918,8 @@
         </p:blipFill>
         <p:spPr>
           <a:xfrm>
-            <a:off x="3175539" y="1584000"/>
-            <a:ext cx="5842121" cy="4770000"/>
+            <a:off x="7094489" y="1584000"/>
+            <a:ext cx="3523020" cy="4770000"/>
           </a:xfrm>
           <a:prstGeom prst="rect">
             <a:avLst/>
@@ -5497,41 +6018,104 @@
           <a:lstStyle/>
           <a:p>
             <a:r>
-              <a:rPr sz="4400" b="1" i="0">
+              <a:rPr sz="4000" b="1" i="0">
                 <a:solidFill>
                   <a:srgbClr val="0E5C63"/>
                 </a:solidFill>
                 <a:latin typeface="Times New Roman"/>
               </a:rPr>
-              <a:t>Máy trạng thái đơn đặt phòng</a:t>
-            </a:r>
-          </a:p>
-        </p:txBody>
-      </p:sp>
-      <p:pic>
-        <p:nvPicPr>
-          <p:cNvPr id="4" name="Picture 3" descr="hinh-3-5-trang-thai-don.png"/>
-          <p:cNvPicPr>
-            <a:picLocks noChangeAspect="1"/>
-          </p:cNvPicPr>
+              <a:t>Giải pháp: để cơ sở dữ liệu quyết định</a:t>
+            </a:r>
+          </a:p>
+        </p:txBody>
+      </p:sp>
+      <p:sp>
+        <p:nvSpPr>
+          <p:cNvPr id="4" name="TextBox 3"/>
+          <p:cNvSpPr txBox="1"/>
           <p:nvPr/>
-        </p:nvPicPr>
-        <p:blipFill>
-          <a:blip r:embed="rId2"/>
-          <a:stretch>
-            <a:fillRect/>
-          </a:stretch>
-        </p:blipFill>
-        <p:spPr>
-          <a:xfrm>
-            <a:off x="3337418" y="1584000"/>
-            <a:ext cx="5518362" cy="4770000"/>
+        </p:nvSpPr>
+        <p:spPr>
+          <a:xfrm>
+            <a:off x="648000" y="1584000"/>
+            <a:ext cx="10897200" cy="4770001"/>
           </a:xfrm>
           <a:prstGeom prst="rect">
             <a:avLst/>
           </a:prstGeom>
-        </p:spPr>
-      </p:pic>
+          <a:noFill/>
+        </p:spPr>
+        <p:txBody>
+          <a:bodyPr wrap="square" anchor="t">
+            <a:spAutoFit/>
+          </a:bodyPr>
+          <a:lstStyle/>
+          <a:p>
+            <a:pPr marL="324000" indent="-324000">
+              <a:spcAft>
+                <a:spcPts val="1600"/>
+              </a:spcAft>
+            </a:pPr>
+            <a:r>
+              <a:rPr sz="3200" b="0" i="0">
+                <a:solidFill>
+                  <a:srgbClr val="1A1A17"/>
+                </a:solidFill>
+                <a:latin typeface="Times New Roman"/>
+              </a:rPr>
+              <a:t>▪  EXCLUDE USING gist (room_id WITH =, stay WITH &amp;&amp;)</a:t>
+            </a:r>
+          </a:p>
+          <a:p>
+            <a:pPr marL="324000" indent="-324000">
+              <a:spcAft>
+                <a:spcPts val="1600"/>
+              </a:spcAft>
+            </a:pPr>
+            <a:r>
+              <a:rPr sz="3200" b="0" i="0">
+                <a:solidFill>
+                  <a:srgbClr val="1A1A17"/>
+                </a:solidFill>
+                <a:latin typeface="Times New Roman"/>
+              </a:rPr>
+              <a:t>▪  Cột stay sinh tự động: daterange(nhận, trả, '[)')</a:t>
+            </a:r>
+          </a:p>
+          <a:p>
+            <a:pPr marL="324000" indent="-324000">
+              <a:spcAft>
+                <a:spcPts val="1600"/>
+              </a:spcAft>
+            </a:pPr>
+            <a:r>
+              <a:rPr sz="3200" b="0" i="0">
+                <a:solidFill>
+                  <a:srgbClr val="1A1A17"/>
+                </a:solidFill>
+                <a:latin typeface="Times New Roman"/>
+              </a:rPr>
+              <a:t>▪  Luồng thứ hai nhận lỗi 23P01 và bị bác — ngay trong giao dịch</a:t>
+            </a:r>
+          </a:p>
+          <a:p>
+            <a:pPr marL="324000" indent="-324000">
+              <a:spcAft>
+                <a:spcPts val="1600"/>
+              </a:spcAft>
+            </a:pPr>
+            <a:r>
+              <a:rPr sz="3200" b="0" i="0">
+                <a:solidFill>
+                  <a:srgbClr val="1A1A17"/>
+                </a:solidFill>
+                <a:latin typeface="Times New Roman"/>
+              </a:rPr>
+              <a:t>▪  MySQL không có daterange lẫn ràng buộc loại trừ</a:t>
+            </a:r>
+          </a:p>
+        </p:txBody>
+      </p:sp>
     </p:spTree>
   </p:cSld>
   <p:clrMapOvr>
@@ -5624,20 +6208,20 @@
           <a:lstStyle/>
           <a:p>
             <a:r>
-              <a:rPr sz="4400" b="1" i="0">
+              <a:rPr sz="4000" b="1" i="0">
                 <a:solidFill>
                   <a:srgbClr val="0E5C63"/>
                 </a:solidFill>
                 <a:latin typeface="Times New Roman"/>
               </a:rPr>
-              <a:t>Thanh toán: mã QR và webhook</a:t>
+              <a:t>Cơ sở dữ liệu: 21 bảng, 9 migration</a:t>
             </a:r>
           </a:p>
         </p:txBody>
       </p:sp>
       <p:pic>
         <p:nvPicPr>
-          <p:cNvPr id="4" name="Picture 3" descr="hinh-3-7-tuan-tu-thanh-toan.png"/>
+          <p:cNvPr id="4" name="Picture 3" descr="hinh-3-3-erd-dat-phong.png"/>
           <p:cNvPicPr>
             <a:picLocks noChangeAspect="1"/>
           </p:cNvPicPr>
@@ -5651,8 +6235,8 @@
         </p:blipFill>
         <p:spPr>
           <a:xfrm>
-            <a:off x="2160027" y="1584000"/>
-            <a:ext cx="7873145" cy="4770000"/>
+            <a:off x="3175539" y="1584000"/>
+            <a:ext cx="5842121" cy="4770000"/>
           </a:xfrm>
           <a:prstGeom prst="rect">
             <a:avLst/>
@@ -5751,20 +6335,20 @@
           <a:lstStyle/>
           <a:p>
             <a:r>
-              <a:rPr sz="4000" b="1" i="0">
+              <a:rPr sz="4400" b="1" i="0">
                 <a:solidFill>
                   <a:srgbClr val="0E5C63"/>
                 </a:solidFill>
                 <a:latin typeface="Times New Roman"/>
               </a:rPr>
-              <a:t>Giao diện khách: ba bước đặt phòng</a:t>
+              <a:t>Lược đồ tổng thể: 20 thực thể</a:t>
             </a:r>
           </a:p>
         </p:txBody>
       </p:sp>
       <p:pic>
         <p:nvPicPr>
-          <p:cNvPr id="4" name="Picture 3" descr="hinh-3-11-ba-buoc-dat-phong.png"/>
+          <p:cNvPr id="4" name="Picture 3" descr="hinh-3-2-erd-tong-the.png"/>
           <p:cNvPicPr>
             <a:picLocks noChangeAspect="1"/>
           </p:cNvPicPr>
@@ -5778,8 +6362,8 @@
         </p:blipFill>
         <p:spPr>
           <a:xfrm>
-            <a:off x="1080000" y="2735752"/>
-            <a:ext cx="10033200" cy="2466495"/>
+            <a:off x="3689234" y="1584000"/>
+            <a:ext cx="4814731" cy="4770000"/>
           </a:xfrm>
           <a:prstGeom prst="rect">
             <a:avLst/>
@@ -5884,14 +6468,14 @@
                 </a:solidFill>
                 <a:latin typeface="Times New Roman"/>
               </a:rPr>
-              <a:t>Khu quản trị: 11 màn hình</a:t>
+              <a:t>Máy trạng thái đơn đặt phòng</a:t>
             </a:r>
           </a:p>
         </p:txBody>
       </p:sp>
       <p:pic>
         <p:nvPicPr>
-          <p:cNvPr id="4" name="Picture 3" descr="hinh-3-13-dashboard.png"/>
+          <p:cNvPr id="4" name="Picture 3" descr="hinh-3-5-trang-thai-don.png"/>
           <p:cNvPicPr>
             <a:picLocks noChangeAspect="1"/>
           </p:cNvPicPr>
@@ -5905,8 +6489,8 @@
         </p:blipFill>
         <p:spPr>
           <a:xfrm>
-            <a:off x="3622248" y="1584000"/>
-            <a:ext cx="4948703" cy="4770000"/>
+            <a:off x="3337418" y="1584000"/>
+            <a:ext cx="5518362" cy="4770000"/>
           </a:xfrm>
           <a:prstGeom prst="rect">
             <a:avLst/>
@@ -6011,98 +6595,35 @@
                 </a:solidFill>
                 <a:latin typeface="Times New Roman"/>
               </a:rPr>
-              <a:t>Kết quả kiểm thử</a:t>
-            </a:r>
-          </a:p>
-        </p:txBody>
-      </p:sp>
-      <p:sp>
-        <p:nvSpPr>
-          <p:cNvPr id="4" name="TextBox 3"/>
-          <p:cNvSpPr txBox="1"/>
+              <a:t>Nhánh khó nhất: tiền về muộn</a:t>
+            </a:r>
+          </a:p>
+        </p:txBody>
+      </p:sp>
+      <p:pic>
+        <p:nvPicPr>
+          <p:cNvPr id="4" name="Picture 3" descr="hinh-3-8-tuan-tu-tien-ve-muon.png"/>
+          <p:cNvPicPr>
+            <a:picLocks noChangeAspect="1"/>
+          </p:cNvPicPr>
           <p:nvPr/>
-        </p:nvSpPr>
-        <p:spPr>
-          <a:xfrm>
-            <a:off x="648000" y="1584000"/>
-            <a:ext cx="10897200" cy="4770001"/>
+        </p:nvPicPr>
+        <p:blipFill>
+          <a:blip r:embed="rId2"/>
+          <a:stretch>
+            <a:fillRect/>
+          </a:stretch>
+        </p:blipFill>
+        <p:spPr>
+          <a:xfrm>
+            <a:off x="2578805" y="1584000"/>
+            <a:ext cx="7035588" cy="4770000"/>
           </a:xfrm>
           <a:prstGeom prst="rect">
             <a:avLst/>
           </a:prstGeom>
-          <a:noFill/>
-        </p:spPr>
-        <p:txBody>
-          <a:bodyPr wrap="square" anchor="t">
-            <a:spAutoFit/>
-          </a:bodyPr>
-          <a:lstStyle/>
-          <a:p>
-            <a:pPr marL="324000" indent="-324000">
-              <a:spcAft>
-                <a:spcPts val="1600"/>
-              </a:spcAft>
-            </a:pPr>
-            <a:r>
-              <a:rPr sz="3200" b="0" i="0">
-                <a:solidFill>
-                  <a:srgbClr val="1A1A17"/>
-                </a:solidFill>
-                <a:latin typeface="Times New Roman"/>
-              </a:rPr>
-              <a:t>▪  136 ca kiểm thử trong 19 lớp</a:t>
-            </a:r>
-          </a:p>
-          <a:p>
-            <a:pPr marL="324000" indent="-324000">
-              <a:spcAft>
-                <a:spcPts val="1600"/>
-              </a:spcAft>
-            </a:pPr>
-            <a:r>
-              <a:rPr sz="3200" b="0" i="0">
-                <a:solidFill>
-                  <a:srgbClr val="1A1A17"/>
-                </a:solidFill>
-                <a:latin typeface="Times New Roman"/>
-              </a:rPr>
-              <a:t>▪  Kiểm thử đa luồng với PostgreSQL thật, không giả lập</a:t>
-            </a:r>
-          </a:p>
-          <a:p>
-            <a:pPr marL="324000" indent="-324000">
-              <a:spcAft>
-                <a:spcPts val="1600"/>
-              </a:spcAft>
-            </a:pPr>
-            <a:r>
-              <a:rPr sz="3200" b="0" i="0">
-                <a:solidFill>
-                  <a:srgbClr val="1A1A17"/>
-                </a:solidFill>
-                <a:latin typeface="Times New Roman"/>
-              </a:rPr>
-              <a:t>▪  11 lỗi thực tế đã tìm ra và khắc phục</a:t>
-            </a:r>
-          </a:p>
-          <a:p>
-            <a:pPr marL="324000" indent="-324000">
-              <a:spcAft>
-                <a:spcPts val="1600"/>
-              </a:spcAft>
-            </a:pPr>
-            <a:r>
-              <a:rPr sz="3200" b="0" i="0">
-                <a:solidFill>
-                  <a:srgbClr val="1A1A17"/>
-                </a:solidFill>
-                <a:latin typeface="Times New Roman"/>
-              </a:rPr>
-              <a:t>▪  Ma trận phân quyền: 30 tiền tố đường dẫn đều được khai</a:t>
-            </a:r>
-          </a:p>
-        </p:txBody>
-      </p:sp>
+        </p:spPr>
+      </p:pic>
     </p:spTree>
   </p:cSld>
   <p:clrMapOvr>
@@ -6201,85 +6722,14 @@
                 </a:solidFill>
                 <a:latin typeface="Times New Roman"/>
               </a:rPr>
-              <a:t>Khả năng tiếp cận và triển khai</a:t>
-            </a:r>
-          </a:p>
-        </p:txBody>
-      </p:sp>
-      <p:sp>
-        <p:nvSpPr>
-          <p:cNvPr id="4" name="TextBox 3"/>
-          <p:cNvSpPr txBox="1"/>
-          <p:nvPr/>
-        </p:nvSpPr>
-        <p:spPr>
-          <a:xfrm>
-            <a:off x="648000" y="1584000"/>
-            <a:ext cx="5220000" cy="4770001"/>
-          </a:xfrm>
-          <a:prstGeom prst="rect">
-            <a:avLst/>
-          </a:prstGeom>
-          <a:noFill/>
-        </p:spPr>
-        <p:txBody>
-          <a:bodyPr wrap="square" anchor="t">
-            <a:spAutoFit/>
-          </a:bodyPr>
-          <a:lstStyle/>
-          <a:p>
-            <a:pPr marL="324000" indent="-324000">
-              <a:spcAft>
-                <a:spcPts val="1600"/>
-              </a:spcAft>
-            </a:pPr>
-            <a:r>
-              <a:rPr sz="2800" b="0" i="0">
-                <a:solidFill>
-                  <a:srgbClr val="1A1A17"/>
-                </a:solidFill>
-                <a:latin typeface="Times New Roman"/>
-              </a:rPr>
-              <a:t>▪  Quét 17 màn hình: 0 vi phạm WCAG 2.1 mức A và AA, 353 lần quy tắc đạt</a:t>
-            </a:r>
-          </a:p>
-          <a:p>
-            <a:pPr marL="324000" indent="-324000">
-              <a:spcAft>
-                <a:spcPts val="1600"/>
-              </a:spcAft>
-            </a:pPr>
-            <a:r>
-              <a:rPr sz="2800" b="0" i="0">
-                <a:solidFill>
-                  <a:srgbClr val="1A1A17"/>
-                </a:solidFill>
-                <a:latin typeface="Times New Roman"/>
-              </a:rPr>
-              <a:t>▪  Kiểm ở ba độ rộng màn hình, vùng chạm tối thiểu 44×44 điểm ảnh</a:t>
-            </a:r>
-          </a:p>
-          <a:p>
-            <a:pPr marL="324000" indent="-324000">
-              <a:spcAft>
-                <a:spcPts val="1600"/>
-              </a:spcAft>
-            </a:pPr>
-            <a:r>
-              <a:rPr sz="2800" b="0" i="0">
-                <a:solidFill>
-                  <a:srgbClr val="1A1A17"/>
-                </a:solidFill>
-                <a:latin typeface="Times New Roman"/>
-              </a:rPr>
-              <a:t>▪  docker compose up -d: bốn dịch vụ đều healthy</a:t>
+              <a:t>Thanh toán: mã QR và webhook</a:t>
             </a:r>
           </a:p>
         </p:txBody>
       </p:sp>
       <p:pic>
         <p:nvPicPr>
-          <p:cNvPr id="5" name="Picture 4" descr="hinh-4-2-quet-kha-nang-tiep-can.png"/>
+          <p:cNvPr id="4" name="Picture 3" descr="hinh-3-7-tuan-tu-thanh-toan.png"/>
           <p:cNvPicPr>
             <a:picLocks noChangeAspect="1"/>
           </p:cNvPicPr>
@@ -6293,8 +6743,8 @@
         </p:blipFill>
         <p:spPr>
           <a:xfrm>
-            <a:off x="6120000" y="2416074"/>
-            <a:ext cx="5472000" cy="3105850"/>
+            <a:off x="2160027" y="1584000"/>
+            <a:ext cx="7873145" cy="4770000"/>
           </a:xfrm>
           <a:prstGeom prst="rect">
             <a:avLst/>
@@ -6393,13 +6843,13 @@
           <a:lstStyle/>
           <a:p>
             <a:r>
-              <a:rPr sz="4400" b="1" i="0">
+              <a:rPr sz="3600" b="1" i="0">
                 <a:solidFill>
                   <a:srgbClr val="0E5C63"/>
                 </a:solidFill>
                 <a:latin typeface="Times New Roman"/>
               </a:rPr>
-              <a:t>Giới hạn đã biết</a:t>
+              <a:t>Thiết kế API: 82 thao tác trên 65 đường dẫn</a:t>
             </a:r>
           </a:p>
         </p:txBody>
@@ -6438,7 +6888,7 @@
                 </a:solidFill>
                 <a:latin typeface="Times New Roman"/>
               </a:rPr>
-              <a:t>▪  Chưa có bảng giá theo từng đêm — giá hiện là giá cố định theo loại phòng</a:t>
+              <a:t>▪  Nhóm công khai: tìm phòng, đặt phòng, tra cứu đơn</a:t>
             </a:r>
           </a:p>
           <a:p>
@@ -6454,7 +6904,7 @@
                 </a:solidFill>
                 <a:latin typeface="Times New Roman"/>
               </a:rPr>
-              <a:t>▪  Tầng giao diện chưa có bộ kiểm thử tự động thường trực</a:t>
+              <a:t>▪  Nhóm khách có tài khoản: xem lại đơn đã đặt</a:t>
             </a:r>
           </a:p>
           <a:p>
@@ -6470,7 +6920,23 @@
                 </a:solidFill>
                 <a:latin typeface="Times New Roman"/>
               </a:rPr>
-              <a:t>▪  Hoàn tiền chưa tự động, chỉ ghi nhận để người xử lý</a:t>
+              <a:t>▪  Nhóm quản trị: đơn, thanh toán, danh mục, nội dung, báo cáo</a:t>
+            </a:r>
+          </a:p>
+          <a:p>
+            <a:pPr marL="324000" indent="-324000">
+              <a:spcAft>
+                <a:spcPts val="1600"/>
+              </a:spcAft>
+            </a:pPr>
+            <a:r>
+              <a:rPr sz="3200" b="0" i="0">
+                <a:solidFill>
+                  <a:srgbClr val="1A1A17"/>
+                </a:solidFill>
+                <a:latin typeface="Times New Roman"/>
+              </a:rPr>
+              <a:t>▪  Nhóm webhook: chỉ nhà cung cấp thanh toán gọi, có khoá riêng</a:t>
             </a:r>
           </a:p>
         </p:txBody>
@@ -6567,13 +7033,13 @@
           <a:lstStyle/>
           <a:p>
             <a:r>
-              <a:rPr sz="4400" b="1" i="0">
+              <a:rPr sz="4000" b="1" i="0">
                 <a:solidFill>
                   <a:srgbClr val="0E5C63"/>
                 </a:solidFill>
                 <a:latin typeface="Times New Roman"/>
               </a:rPr>
-              <a:t>Hướng phát triển</a:t>
+              <a:t>Mô hình bảo mật: mặc định từ chối tất cả</a:t>
             </a:r>
           </a:p>
         </p:txBody>
@@ -6612,7 +7078,7 @@
                 </a:solidFill>
                 <a:latin typeface="Times New Roman"/>
               </a:rPr>
-              <a:t>▪  Bảng giá theo mùa và theo ngày trong tuần</a:t>
+              <a:t>▪  Cấu hình kết thúc bằng một quy tắc từ chối tất cả</a:t>
             </a:r>
           </a:p>
           <a:p>
@@ -6628,7 +7094,7 @@
                 </a:solidFill>
                 <a:latin typeface="Times New Roman"/>
               </a:rPr>
-              <a:t>▪  Ứng dụng di động — dùng lại nguyên giao diện lập trình ứng dụng</a:t>
+              <a:t>▪  Quên khai một đường dẫn mới thì nó bị CHẶN, không bị hở</a:t>
             </a:r>
           </a:p>
           <a:p>
@@ -6644,7 +7110,23 @@
                 </a:solidFill>
                 <a:latin typeface="Times New Roman"/>
               </a:rPr>
-              <a:t>▪  Đồng bộ lịch hai chiều với sàn trung gian</a:t>
+              <a:t>▪  Giới hạn tần suất theo 9 khoá: địa chỉ mạng, danh tính, mã đơn</a:t>
+            </a:r>
+          </a:p>
+          <a:p>
+            <a:pPr marL="324000" indent="-324000">
+              <a:spcAft>
+                <a:spcPts val="1600"/>
+              </a:spcAft>
+            </a:pPr>
+            <a:r>
+              <a:rPr sz="3200" b="0" i="0">
+                <a:solidFill>
+                  <a:srgbClr val="1A1A17"/>
+                </a:solidFill>
+                <a:latin typeface="Times New Roman"/>
+              </a:rPr>
+              <a:t>▪  9 kịch bản tấn công thử trên hệ thống đang chạy — tất cả đều bị chặn</a:t>
             </a:r>
           </a:p>
         </p:txBody>
@@ -6947,104 +7429,41 @@
           <a:lstStyle/>
           <a:p>
             <a:r>
-              <a:rPr sz="4400" b="1" i="0">
+              <a:rPr sz="4000" b="1" i="0">
                 <a:solidFill>
                   <a:srgbClr val="0E5C63"/>
                 </a:solidFill>
                 <a:latin typeface="Times New Roman"/>
               </a:rPr>
-              <a:t>Liên kết</a:t>
-            </a:r>
-          </a:p>
-        </p:txBody>
-      </p:sp>
-      <p:sp>
-        <p:nvSpPr>
-          <p:cNvPr id="4" name="TextBox 3"/>
-          <p:cNvSpPr txBox="1"/>
+              <a:t>Giao diện khách: ba bước đặt phòng</a:t>
+            </a:r>
+          </a:p>
+        </p:txBody>
+      </p:sp>
+      <p:pic>
+        <p:nvPicPr>
+          <p:cNvPr id="4" name="Picture 3" descr="hinh-3-11-ba-buoc-dat-phong.png"/>
+          <p:cNvPicPr>
+            <a:picLocks noChangeAspect="1"/>
+          </p:cNvPicPr>
           <p:nvPr/>
-        </p:nvSpPr>
-        <p:spPr>
-          <a:xfrm>
-            <a:off x="648000" y="1584000"/>
-            <a:ext cx="10897200" cy="4770001"/>
+        </p:nvPicPr>
+        <p:blipFill>
+          <a:blip r:embed="rId2"/>
+          <a:stretch>
+            <a:fillRect/>
+          </a:stretch>
+        </p:blipFill>
+        <p:spPr>
+          <a:xfrm>
+            <a:off x="1080000" y="2735752"/>
+            <a:ext cx="10033200" cy="2466495"/>
           </a:xfrm>
           <a:prstGeom prst="rect">
             <a:avLst/>
           </a:prstGeom>
-          <a:noFill/>
-        </p:spPr>
-        <p:txBody>
-          <a:bodyPr wrap="square" anchor="t">
-            <a:spAutoFit/>
-          </a:bodyPr>
-          <a:lstStyle/>
-          <a:p>
-            <a:pPr marL="324000" indent="-324000">
-              <a:spcAft>
-                <a:spcPts val="1600"/>
-              </a:spcAft>
-            </a:pPr>
-            <a:r>
-              <a:rPr sz="3200" b="0" i="0">
-                <a:solidFill>
-                  <a:srgbClr val="1A1A17"/>
-                </a:solidFill>
-                <a:latin typeface="Times New Roman"/>
-              </a:rPr>
-              <a:t>▪  Video thuyết trình:  «DÁN LIÊN KẾT GOOGLE DRIVE VÀO ĐÂY»</a:t>
-            </a:r>
-          </a:p>
-          <a:p>
-            <a:pPr marL="324000" indent="-324000">
-              <a:spcAft>
-                <a:spcPts val="1600"/>
-              </a:spcAft>
-            </a:pPr>
-            <a:r>
-              <a:rPr sz="3200" b="0" i="0">
-                <a:solidFill>
-                  <a:srgbClr val="1A1A17"/>
-                </a:solidFill>
-                <a:latin typeface="Times New Roman"/>
-              </a:rPr>
-              <a:t>▪  Mã nguồn và toàn bộ tài liệu:</a:t>
-            </a:r>
-          </a:p>
-          <a:p>
-            <a:pPr marL="324000" indent="-324000">
-              <a:spcAft>
-                <a:spcPts val="1600"/>
-              </a:spcAft>
-            </a:pPr>
-            <a:r>
-              <a:rPr sz="3200" b="0" i="0">
-                <a:solidFill>
-                  <a:srgbClr val="1A1A17"/>
-                </a:solidFill>
-                <a:latin typeface="Times New Roman"/>
-              </a:rPr>
-              <a:t>▪  github.com/nhquan403/cn-dx23tt11-nguyenhongquan-homestay-tvu</a:t>
-            </a:r>
-          </a:p>
-          <a:p>
-            <a:pPr marL="324000" indent="-324000">
-              <a:spcAft>
-                <a:spcPts val="1600"/>
-              </a:spcAft>
-            </a:pPr>
-            <a:r>
-              <a:rPr sz="3200" b="0" i="0">
-                <a:solidFill>
-                  <a:srgbClr val="1A1A17"/>
-                </a:solidFill>
-                <a:latin typeface="Times New Roman"/>
-              </a:rPr>
-              <a:t>▪  Bản trình diễn hệ thống 10 phút: thesis/abs/ trong kho mã nguồn</a:t>
-            </a:r>
-          </a:p>
-        </p:txBody>
-      </p:sp>
+        </p:spPr>
+      </p:pic>
     </p:spTree>
   </p:cSld>
   <p:clrMapOvr>
@@ -7054,6 +7473,1186 @@
 </file>
 
 <file path=ppt/slides/slide21.xml><?xml version="1.0" encoding="utf-8"?>
+<p:sld xmlns:a="http://schemas.openxmlformats.org/drawingml/2006/main" xmlns:p="http://schemas.openxmlformats.org/presentationml/2006/main" xmlns:r="http://schemas.openxmlformats.org/officeDocument/2006/relationships">
+  <p:cSld>
+    <p:bg>
+      <p:bgPr>
+        <a:solidFill>
+          <a:srgbClr val="FBF9F6"/>
+        </a:solidFill>
+        <a:effectLst/>
+      </p:bgPr>
+    </p:bg>
+    <p:spTree>
+      <p:nvGrpSpPr>
+        <p:cNvPr id="1" name=""/>
+        <p:cNvGrpSpPr/>
+        <p:nvPr/>
+      </p:nvGrpSpPr>
+      <p:grpSpPr/>
+      <p:sp>
+        <p:nvSpPr>
+          <p:cNvPr id="2" name="Rectangle 1"/>
+          <p:cNvSpPr/>
+          <p:nvPr/>
+        </p:nvSpPr>
+        <p:spPr>
+          <a:xfrm>
+            <a:off x="0" y="0"/>
+            <a:ext cx="12193200" cy="144000"/>
+          </a:xfrm>
+          <a:prstGeom prst="rect">
+            <a:avLst/>
+          </a:prstGeom>
+          <a:solidFill>
+            <a:srgbClr val="0E5C63"/>
+          </a:solidFill>
+          <a:ln>
+            <a:noFill/>
+          </a:ln>
+        </p:spPr>
+        <p:style>
+          <a:lnRef idx="1">
+            <a:schemeClr val="accent1"/>
+          </a:lnRef>
+          <a:fillRef idx="3">
+            <a:schemeClr val="accent1"/>
+          </a:fillRef>
+          <a:effectRef idx="2">
+            <a:schemeClr val="accent1"/>
+          </a:effectRef>
+          <a:fontRef idx="minor">
+            <a:schemeClr val="lt1"/>
+          </a:fontRef>
+        </p:style>
+        <p:txBody>
+          <a:bodyPr rtlCol="0" anchor="ctr"/>
+          <a:lstStyle/>
+          <a:p>
+            <a:pPr algn="ctr"/>
+          </a:p>
+        </p:txBody>
+      </p:sp>
+      <p:sp>
+        <p:nvSpPr>
+          <p:cNvPr id="3" name="TextBox 2"/>
+          <p:cNvSpPr txBox="1"/>
+          <p:nvPr/>
+        </p:nvSpPr>
+        <p:spPr>
+          <a:xfrm>
+            <a:off x="648000" y="396000"/>
+            <a:ext cx="10897200" cy="936000"/>
+          </a:xfrm>
+          <a:prstGeom prst="rect">
+            <a:avLst/>
+          </a:prstGeom>
+          <a:noFill/>
+        </p:spPr>
+        <p:txBody>
+          <a:bodyPr wrap="square" anchor="t">
+            <a:spAutoFit/>
+          </a:bodyPr>
+          <a:lstStyle/>
+          <a:p>
+            <a:r>
+              <a:rPr sz="4400" b="1" i="0">
+                <a:solidFill>
+                  <a:srgbClr val="0E5C63"/>
+                </a:solidFill>
+                <a:latin typeface="Times New Roman"/>
+              </a:rPr>
+              <a:t>Khu quản trị: 11 màn hình</a:t>
+            </a:r>
+          </a:p>
+        </p:txBody>
+      </p:sp>
+      <p:pic>
+        <p:nvPicPr>
+          <p:cNvPr id="4" name="Picture 3" descr="hinh-3-13-dashboard.png"/>
+          <p:cNvPicPr>
+            <a:picLocks noChangeAspect="1"/>
+          </p:cNvPicPr>
+          <p:nvPr/>
+        </p:nvPicPr>
+        <p:blipFill>
+          <a:blip r:embed="rId2"/>
+          <a:stretch>
+            <a:fillRect/>
+          </a:stretch>
+        </p:blipFill>
+        <p:spPr>
+          <a:xfrm>
+            <a:off x="3622248" y="1584000"/>
+            <a:ext cx="4948703" cy="4770000"/>
+          </a:xfrm>
+          <a:prstGeom prst="rect">
+            <a:avLst/>
+          </a:prstGeom>
+        </p:spPr>
+      </p:pic>
+    </p:spTree>
+  </p:cSld>
+  <p:clrMapOvr>
+    <a:masterClrMapping/>
+  </p:clrMapOvr>
+</p:sld>
+</file>
+
+<file path=ppt/slides/slide22.xml><?xml version="1.0" encoding="utf-8"?>
+<p:sld xmlns:a="http://schemas.openxmlformats.org/drawingml/2006/main" xmlns:p="http://schemas.openxmlformats.org/presentationml/2006/main" xmlns:r="http://schemas.openxmlformats.org/officeDocument/2006/relationships">
+  <p:cSld>
+    <p:bg>
+      <p:bgPr>
+        <a:solidFill>
+          <a:srgbClr val="FBF9F6"/>
+        </a:solidFill>
+        <a:effectLst/>
+      </p:bgPr>
+    </p:bg>
+    <p:spTree>
+      <p:nvGrpSpPr>
+        <p:cNvPr id="1" name=""/>
+        <p:cNvGrpSpPr/>
+        <p:nvPr/>
+      </p:nvGrpSpPr>
+      <p:grpSpPr/>
+      <p:sp>
+        <p:nvSpPr>
+          <p:cNvPr id="2" name="Rectangle 1"/>
+          <p:cNvSpPr/>
+          <p:nvPr/>
+        </p:nvSpPr>
+        <p:spPr>
+          <a:xfrm>
+            <a:off x="0" y="0"/>
+            <a:ext cx="12193200" cy="144000"/>
+          </a:xfrm>
+          <a:prstGeom prst="rect">
+            <a:avLst/>
+          </a:prstGeom>
+          <a:solidFill>
+            <a:srgbClr val="0E5C63"/>
+          </a:solidFill>
+          <a:ln>
+            <a:noFill/>
+          </a:ln>
+        </p:spPr>
+        <p:style>
+          <a:lnRef idx="1">
+            <a:schemeClr val="accent1"/>
+          </a:lnRef>
+          <a:fillRef idx="3">
+            <a:schemeClr val="accent1"/>
+          </a:fillRef>
+          <a:effectRef idx="2">
+            <a:schemeClr val="accent1"/>
+          </a:effectRef>
+          <a:fontRef idx="minor">
+            <a:schemeClr val="lt1"/>
+          </a:fontRef>
+        </p:style>
+        <p:txBody>
+          <a:bodyPr rtlCol="0" anchor="ctr"/>
+          <a:lstStyle/>
+          <a:p>
+            <a:pPr algn="ctr"/>
+          </a:p>
+        </p:txBody>
+      </p:sp>
+      <p:sp>
+        <p:nvSpPr>
+          <p:cNvPr id="3" name="TextBox 2"/>
+          <p:cNvSpPr txBox="1"/>
+          <p:nvPr/>
+        </p:nvSpPr>
+        <p:spPr>
+          <a:xfrm>
+            <a:off x="648000" y="396000"/>
+            <a:ext cx="10897200" cy="936000"/>
+          </a:xfrm>
+          <a:prstGeom prst="rect">
+            <a:avLst/>
+          </a:prstGeom>
+          <a:noFill/>
+        </p:spPr>
+        <p:txBody>
+          <a:bodyPr wrap="square" anchor="t">
+            <a:spAutoFit/>
+          </a:bodyPr>
+          <a:lstStyle/>
+          <a:p>
+            <a:r>
+              <a:rPr sz="4400" b="1" i="0">
+                <a:solidFill>
+                  <a:srgbClr val="0E5C63"/>
+                </a:solidFill>
+                <a:latin typeface="Times New Roman"/>
+              </a:rPr>
+              <a:t>Kết quả kiểm thử</a:t>
+            </a:r>
+          </a:p>
+        </p:txBody>
+      </p:sp>
+      <p:sp>
+        <p:nvSpPr>
+          <p:cNvPr id="4" name="TextBox 3"/>
+          <p:cNvSpPr txBox="1"/>
+          <p:nvPr/>
+        </p:nvSpPr>
+        <p:spPr>
+          <a:xfrm>
+            <a:off x="648000" y="1584000"/>
+            <a:ext cx="10897200" cy="4770001"/>
+          </a:xfrm>
+          <a:prstGeom prst="rect">
+            <a:avLst/>
+          </a:prstGeom>
+          <a:noFill/>
+        </p:spPr>
+        <p:txBody>
+          <a:bodyPr wrap="square" anchor="t">
+            <a:spAutoFit/>
+          </a:bodyPr>
+          <a:lstStyle/>
+          <a:p>
+            <a:pPr marL="324000" indent="-324000">
+              <a:spcAft>
+                <a:spcPts val="1600"/>
+              </a:spcAft>
+            </a:pPr>
+            <a:r>
+              <a:rPr sz="3200" b="0" i="0">
+                <a:solidFill>
+                  <a:srgbClr val="1A1A17"/>
+                </a:solidFill>
+                <a:latin typeface="Times New Roman"/>
+              </a:rPr>
+              <a:t>▪  136 ca kiểm thử trong 19 lớp</a:t>
+            </a:r>
+          </a:p>
+          <a:p>
+            <a:pPr marL="324000" indent="-324000">
+              <a:spcAft>
+                <a:spcPts val="1600"/>
+              </a:spcAft>
+            </a:pPr>
+            <a:r>
+              <a:rPr sz="3200" b="0" i="0">
+                <a:solidFill>
+                  <a:srgbClr val="1A1A17"/>
+                </a:solidFill>
+                <a:latin typeface="Times New Roman"/>
+              </a:rPr>
+              <a:t>▪  Kiểm thử đa luồng với PostgreSQL thật, không giả lập</a:t>
+            </a:r>
+          </a:p>
+          <a:p>
+            <a:pPr marL="324000" indent="-324000">
+              <a:spcAft>
+                <a:spcPts val="1600"/>
+              </a:spcAft>
+            </a:pPr>
+            <a:r>
+              <a:rPr sz="3200" b="0" i="0">
+                <a:solidFill>
+                  <a:srgbClr val="1A1A17"/>
+                </a:solidFill>
+                <a:latin typeface="Times New Roman"/>
+              </a:rPr>
+              <a:t>▪  11 lỗi thực tế đã tìm ra và khắc phục</a:t>
+            </a:r>
+          </a:p>
+          <a:p>
+            <a:pPr marL="324000" indent="-324000">
+              <a:spcAft>
+                <a:spcPts val="1600"/>
+              </a:spcAft>
+            </a:pPr>
+            <a:r>
+              <a:rPr sz="3200" b="0" i="0">
+                <a:solidFill>
+                  <a:srgbClr val="1A1A17"/>
+                </a:solidFill>
+                <a:latin typeface="Times New Roman"/>
+              </a:rPr>
+              <a:t>▪  Ma trận phân quyền: 30 tiền tố đường dẫn đều được khai</a:t>
+            </a:r>
+          </a:p>
+        </p:txBody>
+      </p:sp>
+    </p:spTree>
+  </p:cSld>
+  <p:clrMapOvr>
+    <a:masterClrMapping/>
+  </p:clrMapOvr>
+</p:sld>
+</file>
+
+<file path=ppt/slides/slide23.xml><?xml version="1.0" encoding="utf-8"?>
+<p:sld xmlns:a="http://schemas.openxmlformats.org/drawingml/2006/main" xmlns:p="http://schemas.openxmlformats.org/presentationml/2006/main" xmlns:r="http://schemas.openxmlformats.org/officeDocument/2006/relationships">
+  <p:cSld>
+    <p:bg>
+      <p:bgPr>
+        <a:solidFill>
+          <a:srgbClr val="FBF9F6"/>
+        </a:solidFill>
+        <a:effectLst/>
+      </p:bgPr>
+    </p:bg>
+    <p:spTree>
+      <p:nvGrpSpPr>
+        <p:cNvPr id="1" name=""/>
+        <p:cNvGrpSpPr/>
+        <p:nvPr/>
+      </p:nvGrpSpPr>
+      <p:grpSpPr/>
+      <p:sp>
+        <p:nvSpPr>
+          <p:cNvPr id="2" name="Rectangle 1"/>
+          <p:cNvSpPr/>
+          <p:nvPr/>
+        </p:nvSpPr>
+        <p:spPr>
+          <a:xfrm>
+            <a:off x="0" y="0"/>
+            <a:ext cx="12193200" cy="144000"/>
+          </a:xfrm>
+          <a:prstGeom prst="rect">
+            <a:avLst/>
+          </a:prstGeom>
+          <a:solidFill>
+            <a:srgbClr val="0E5C63"/>
+          </a:solidFill>
+          <a:ln>
+            <a:noFill/>
+          </a:ln>
+        </p:spPr>
+        <p:style>
+          <a:lnRef idx="1">
+            <a:schemeClr val="accent1"/>
+          </a:lnRef>
+          <a:fillRef idx="3">
+            <a:schemeClr val="accent1"/>
+          </a:fillRef>
+          <a:effectRef idx="2">
+            <a:schemeClr val="accent1"/>
+          </a:effectRef>
+          <a:fontRef idx="minor">
+            <a:schemeClr val="lt1"/>
+          </a:fontRef>
+        </p:style>
+        <p:txBody>
+          <a:bodyPr rtlCol="0" anchor="ctr"/>
+          <a:lstStyle/>
+          <a:p>
+            <a:pPr algn="ctr"/>
+          </a:p>
+        </p:txBody>
+      </p:sp>
+      <p:sp>
+        <p:nvSpPr>
+          <p:cNvPr id="3" name="TextBox 2"/>
+          <p:cNvSpPr txBox="1"/>
+          <p:nvPr/>
+        </p:nvSpPr>
+        <p:spPr>
+          <a:xfrm>
+            <a:off x="648000" y="396000"/>
+            <a:ext cx="10897200" cy="936000"/>
+          </a:xfrm>
+          <a:prstGeom prst="rect">
+            <a:avLst/>
+          </a:prstGeom>
+          <a:noFill/>
+        </p:spPr>
+        <p:txBody>
+          <a:bodyPr wrap="square" anchor="t">
+            <a:spAutoFit/>
+          </a:bodyPr>
+          <a:lstStyle/>
+          <a:p>
+            <a:r>
+              <a:rPr sz="4000" b="1" i="0">
+                <a:solidFill>
+                  <a:srgbClr val="0E5C63"/>
+                </a:solidFill>
+                <a:latin typeface="Times New Roman"/>
+              </a:rPr>
+              <a:t>Mười một lỗi thực tế đã tìm ra và sửa</a:t>
+            </a:r>
+          </a:p>
+        </p:txBody>
+      </p:sp>
+      <p:pic>
+        <p:nvPicPr>
+          <p:cNvPr id="4" name="Picture 3" descr="hinh-4-1-do-tuong-phan.png"/>
+          <p:cNvPicPr>
+            <a:picLocks noChangeAspect="1"/>
+          </p:cNvPicPr>
+          <p:nvPr/>
+        </p:nvPicPr>
+        <p:blipFill>
+          <a:blip r:embed="rId2"/>
+          <a:stretch>
+            <a:fillRect/>
+          </a:stretch>
+        </p:blipFill>
+        <p:spPr>
+          <a:xfrm>
+            <a:off x="1080000" y="2833664"/>
+            <a:ext cx="10033200" cy="2270671"/>
+          </a:xfrm>
+          <a:prstGeom prst="rect">
+            <a:avLst/>
+          </a:prstGeom>
+        </p:spPr>
+      </p:pic>
+    </p:spTree>
+  </p:cSld>
+  <p:clrMapOvr>
+    <a:masterClrMapping/>
+  </p:clrMapOvr>
+</p:sld>
+</file>
+
+<file path=ppt/slides/slide24.xml><?xml version="1.0" encoding="utf-8"?>
+<p:sld xmlns:a="http://schemas.openxmlformats.org/drawingml/2006/main" xmlns:p="http://schemas.openxmlformats.org/presentationml/2006/main" xmlns:r="http://schemas.openxmlformats.org/officeDocument/2006/relationships">
+  <p:cSld>
+    <p:bg>
+      <p:bgPr>
+        <a:solidFill>
+          <a:srgbClr val="FBF9F6"/>
+        </a:solidFill>
+        <a:effectLst/>
+      </p:bgPr>
+    </p:bg>
+    <p:spTree>
+      <p:nvGrpSpPr>
+        <p:cNvPr id="1" name=""/>
+        <p:cNvGrpSpPr/>
+        <p:nvPr/>
+      </p:nvGrpSpPr>
+      <p:grpSpPr/>
+      <p:sp>
+        <p:nvSpPr>
+          <p:cNvPr id="2" name="Rectangle 1"/>
+          <p:cNvSpPr/>
+          <p:nvPr/>
+        </p:nvSpPr>
+        <p:spPr>
+          <a:xfrm>
+            <a:off x="0" y="0"/>
+            <a:ext cx="12193200" cy="144000"/>
+          </a:xfrm>
+          <a:prstGeom prst="rect">
+            <a:avLst/>
+          </a:prstGeom>
+          <a:solidFill>
+            <a:srgbClr val="0E5C63"/>
+          </a:solidFill>
+          <a:ln>
+            <a:noFill/>
+          </a:ln>
+        </p:spPr>
+        <p:style>
+          <a:lnRef idx="1">
+            <a:schemeClr val="accent1"/>
+          </a:lnRef>
+          <a:fillRef idx="3">
+            <a:schemeClr val="accent1"/>
+          </a:fillRef>
+          <a:effectRef idx="2">
+            <a:schemeClr val="accent1"/>
+          </a:effectRef>
+          <a:fontRef idx="minor">
+            <a:schemeClr val="lt1"/>
+          </a:fontRef>
+        </p:style>
+        <p:txBody>
+          <a:bodyPr rtlCol="0" anchor="ctr"/>
+          <a:lstStyle/>
+          <a:p>
+            <a:pPr algn="ctr"/>
+          </a:p>
+        </p:txBody>
+      </p:sp>
+      <p:sp>
+        <p:nvSpPr>
+          <p:cNvPr id="3" name="TextBox 2"/>
+          <p:cNvSpPr txBox="1"/>
+          <p:nvPr/>
+        </p:nvSpPr>
+        <p:spPr>
+          <a:xfrm>
+            <a:off x="648000" y="396000"/>
+            <a:ext cx="10897200" cy="936000"/>
+          </a:xfrm>
+          <a:prstGeom prst="rect">
+            <a:avLst/>
+          </a:prstGeom>
+          <a:noFill/>
+        </p:spPr>
+        <p:txBody>
+          <a:bodyPr wrap="square" anchor="t">
+            <a:spAutoFit/>
+          </a:bodyPr>
+          <a:lstStyle/>
+          <a:p>
+            <a:r>
+              <a:rPr sz="4400" b="1" i="0">
+                <a:solidFill>
+                  <a:srgbClr val="0E5C63"/>
+                </a:solidFill>
+                <a:latin typeface="Times New Roman"/>
+              </a:rPr>
+              <a:t>Khả năng tiếp cận và triển khai</a:t>
+            </a:r>
+          </a:p>
+        </p:txBody>
+      </p:sp>
+      <p:sp>
+        <p:nvSpPr>
+          <p:cNvPr id="4" name="TextBox 3"/>
+          <p:cNvSpPr txBox="1"/>
+          <p:nvPr/>
+        </p:nvSpPr>
+        <p:spPr>
+          <a:xfrm>
+            <a:off x="648000" y="1584000"/>
+            <a:ext cx="5220000" cy="4770001"/>
+          </a:xfrm>
+          <a:prstGeom prst="rect">
+            <a:avLst/>
+          </a:prstGeom>
+          <a:noFill/>
+        </p:spPr>
+        <p:txBody>
+          <a:bodyPr wrap="square" anchor="t">
+            <a:spAutoFit/>
+          </a:bodyPr>
+          <a:lstStyle/>
+          <a:p>
+            <a:pPr marL="324000" indent="-324000">
+              <a:spcAft>
+                <a:spcPts val="1600"/>
+              </a:spcAft>
+            </a:pPr>
+            <a:r>
+              <a:rPr sz="2800" b="0" i="0">
+                <a:solidFill>
+                  <a:srgbClr val="1A1A17"/>
+                </a:solidFill>
+                <a:latin typeface="Times New Roman"/>
+              </a:rPr>
+              <a:t>▪  Quét 17 màn hình: 0 vi phạm WCAG 2.1 mức A và AA, 353 lần quy tắc đạt</a:t>
+            </a:r>
+          </a:p>
+          <a:p>
+            <a:pPr marL="324000" indent="-324000">
+              <a:spcAft>
+                <a:spcPts val="1600"/>
+              </a:spcAft>
+            </a:pPr>
+            <a:r>
+              <a:rPr sz="2800" b="0" i="0">
+                <a:solidFill>
+                  <a:srgbClr val="1A1A17"/>
+                </a:solidFill>
+                <a:latin typeface="Times New Roman"/>
+              </a:rPr>
+              <a:t>▪  Kiểm ở ba độ rộng màn hình, vùng chạm tối thiểu 44×44 điểm ảnh</a:t>
+            </a:r>
+          </a:p>
+          <a:p>
+            <a:pPr marL="324000" indent="-324000">
+              <a:spcAft>
+                <a:spcPts val="1600"/>
+              </a:spcAft>
+            </a:pPr>
+            <a:r>
+              <a:rPr sz="2800" b="0" i="0">
+                <a:solidFill>
+                  <a:srgbClr val="1A1A17"/>
+                </a:solidFill>
+                <a:latin typeface="Times New Roman"/>
+              </a:rPr>
+              <a:t>▪  docker compose up -d: bốn dịch vụ đều healthy</a:t>
+            </a:r>
+          </a:p>
+        </p:txBody>
+      </p:sp>
+      <p:pic>
+        <p:nvPicPr>
+          <p:cNvPr id="5" name="Picture 4" descr="hinh-4-2-quet-kha-nang-tiep-can.png"/>
+          <p:cNvPicPr>
+            <a:picLocks noChangeAspect="1"/>
+          </p:cNvPicPr>
+          <p:nvPr/>
+        </p:nvPicPr>
+        <p:blipFill>
+          <a:blip r:embed="rId2"/>
+          <a:stretch>
+            <a:fillRect/>
+          </a:stretch>
+        </p:blipFill>
+        <p:spPr>
+          <a:xfrm>
+            <a:off x="6120000" y="2416074"/>
+            <a:ext cx="5472000" cy="3105850"/>
+          </a:xfrm>
+          <a:prstGeom prst="rect">
+            <a:avLst/>
+          </a:prstGeom>
+        </p:spPr>
+      </p:pic>
+    </p:spTree>
+  </p:cSld>
+  <p:clrMapOvr>
+    <a:masterClrMapping/>
+  </p:clrMapOvr>
+</p:sld>
+</file>
+
+<file path=ppt/slides/slide25.xml><?xml version="1.0" encoding="utf-8"?>
+<p:sld xmlns:a="http://schemas.openxmlformats.org/drawingml/2006/main" xmlns:p="http://schemas.openxmlformats.org/presentationml/2006/main" xmlns:r="http://schemas.openxmlformats.org/officeDocument/2006/relationships">
+  <p:cSld>
+    <p:bg>
+      <p:bgPr>
+        <a:solidFill>
+          <a:srgbClr val="FBF9F6"/>
+        </a:solidFill>
+        <a:effectLst/>
+      </p:bgPr>
+    </p:bg>
+    <p:spTree>
+      <p:nvGrpSpPr>
+        <p:cNvPr id="1" name=""/>
+        <p:cNvGrpSpPr/>
+        <p:nvPr/>
+      </p:nvGrpSpPr>
+      <p:grpSpPr/>
+      <p:sp>
+        <p:nvSpPr>
+          <p:cNvPr id="2" name="Rectangle 1"/>
+          <p:cNvSpPr/>
+          <p:nvPr/>
+        </p:nvSpPr>
+        <p:spPr>
+          <a:xfrm>
+            <a:off x="0" y="0"/>
+            <a:ext cx="12193200" cy="144000"/>
+          </a:xfrm>
+          <a:prstGeom prst="rect">
+            <a:avLst/>
+          </a:prstGeom>
+          <a:solidFill>
+            <a:srgbClr val="0E5C63"/>
+          </a:solidFill>
+          <a:ln>
+            <a:noFill/>
+          </a:ln>
+        </p:spPr>
+        <p:style>
+          <a:lnRef idx="1">
+            <a:schemeClr val="accent1"/>
+          </a:lnRef>
+          <a:fillRef idx="3">
+            <a:schemeClr val="accent1"/>
+          </a:fillRef>
+          <a:effectRef idx="2">
+            <a:schemeClr val="accent1"/>
+          </a:effectRef>
+          <a:fontRef idx="minor">
+            <a:schemeClr val="lt1"/>
+          </a:fontRef>
+        </p:style>
+        <p:txBody>
+          <a:bodyPr rtlCol="0" anchor="ctr"/>
+          <a:lstStyle/>
+          <a:p>
+            <a:pPr algn="ctr"/>
+          </a:p>
+        </p:txBody>
+      </p:sp>
+      <p:sp>
+        <p:nvSpPr>
+          <p:cNvPr id="3" name="TextBox 2"/>
+          <p:cNvSpPr txBox="1"/>
+          <p:nvPr/>
+        </p:nvSpPr>
+        <p:spPr>
+          <a:xfrm>
+            <a:off x="648000" y="396000"/>
+            <a:ext cx="10897200" cy="936000"/>
+          </a:xfrm>
+          <a:prstGeom prst="rect">
+            <a:avLst/>
+          </a:prstGeom>
+          <a:noFill/>
+        </p:spPr>
+        <p:txBody>
+          <a:bodyPr wrap="square" anchor="t">
+            <a:spAutoFit/>
+          </a:bodyPr>
+          <a:lstStyle/>
+          <a:p>
+            <a:r>
+              <a:rPr sz="4400" b="1" i="0">
+                <a:solidFill>
+                  <a:srgbClr val="0E5C63"/>
+                </a:solidFill>
+                <a:latin typeface="Times New Roman"/>
+              </a:rPr>
+              <a:t>Giới hạn đã biết</a:t>
+            </a:r>
+          </a:p>
+        </p:txBody>
+      </p:sp>
+      <p:sp>
+        <p:nvSpPr>
+          <p:cNvPr id="4" name="TextBox 3"/>
+          <p:cNvSpPr txBox="1"/>
+          <p:nvPr/>
+        </p:nvSpPr>
+        <p:spPr>
+          <a:xfrm>
+            <a:off x="648000" y="1584000"/>
+            <a:ext cx="10897200" cy="4770001"/>
+          </a:xfrm>
+          <a:prstGeom prst="rect">
+            <a:avLst/>
+          </a:prstGeom>
+          <a:noFill/>
+        </p:spPr>
+        <p:txBody>
+          <a:bodyPr wrap="square" anchor="t">
+            <a:spAutoFit/>
+          </a:bodyPr>
+          <a:lstStyle/>
+          <a:p>
+            <a:pPr marL="324000" indent="-324000">
+              <a:spcAft>
+                <a:spcPts val="1600"/>
+              </a:spcAft>
+            </a:pPr>
+            <a:r>
+              <a:rPr sz="3200" b="0" i="0">
+                <a:solidFill>
+                  <a:srgbClr val="1A1A17"/>
+                </a:solidFill>
+                <a:latin typeface="Times New Roman"/>
+              </a:rPr>
+              <a:t>▪  Chưa có bảng giá theo từng đêm — giá hiện là giá cố định theo loại phòng</a:t>
+            </a:r>
+          </a:p>
+          <a:p>
+            <a:pPr marL="324000" indent="-324000">
+              <a:spcAft>
+                <a:spcPts val="1600"/>
+              </a:spcAft>
+            </a:pPr>
+            <a:r>
+              <a:rPr sz="3200" b="0" i="0">
+                <a:solidFill>
+                  <a:srgbClr val="1A1A17"/>
+                </a:solidFill>
+                <a:latin typeface="Times New Roman"/>
+              </a:rPr>
+              <a:t>▪  Tầng giao diện chưa có bộ kiểm thử tự động thường trực</a:t>
+            </a:r>
+          </a:p>
+          <a:p>
+            <a:pPr marL="324000" indent="-324000">
+              <a:spcAft>
+                <a:spcPts val="1600"/>
+              </a:spcAft>
+            </a:pPr>
+            <a:r>
+              <a:rPr sz="3200" b="0" i="0">
+                <a:solidFill>
+                  <a:srgbClr val="1A1A17"/>
+                </a:solidFill>
+                <a:latin typeface="Times New Roman"/>
+              </a:rPr>
+              <a:t>▪  Hoàn tiền chưa tự động, chỉ ghi nhận để người xử lý</a:t>
+            </a:r>
+          </a:p>
+        </p:txBody>
+      </p:sp>
+    </p:spTree>
+  </p:cSld>
+  <p:clrMapOvr>
+    <a:masterClrMapping/>
+  </p:clrMapOvr>
+</p:sld>
+</file>
+
+<file path=ppt/slides/slide26.xml><?xml version="1.0" encoding="utf-8"?>
+<p:sld xmlns:a="http://schemas.openxmlformats.org/drawingml/2006/main" xmlns:p="http://schemas.openxmlformats.org/presentationml/2006/main" xmlns:r="http://schemas.openxmlformats.org/officeDocument/2006/relationships">
+  <p:cSld>
+    <p:bg>
+      <p:bgPr>
+        <a:solidFill>
+          <a:srgbClr val="FBF9F6"/>
+        </a:solidFill>
+        <a:effectLst/>
+      </p:bgPr>
+    </p:bg>
+    <p:spTree>
+      <p:nvGrpSpPr>
+        <p:cNvPr id="1" name=""/>
+        <p:cNvGrpSpPr/>
+        <p:nvPr/>
+      </p:nvGrpSpPr>
+      <p:grpSpPr/>
+      <p:sp>
+        <p:nvSpPr>
+          <p:cNvPr id="2" name="Rectangle 1"/>
+          <p:cNvSpPr/>
+          <p:nvPr/>
+        </p:nvSpPr>
+        <p:spPr>
+          <a:xfrm>
+            <a:off x="0" y="0"/>
+            <a:ext cx="12193200" cy="144000"/>
+          </a:xfrm>
+          <a:prstGeom prst="rect">
+            <a:avLst/>
+          </a:prstGeom>
+          <a:solidFill>
+            <a:srgbClr val="0E5C63"/>
+          </a:solidFill>
+          <a:ln>
+            <a:noFill/>
+          </a:ln>
+        </p:spPr>
+        <p:style>
+          <a:lnRef idx="1">
+            <a:schemeClr val="accent1"/>
+          </a:lnRef>
+          <a:fillRef idx="3">
+            <a:schemeClr val="accent1"/>
+          </a:fillRef>
+          <a:effectRef idx="2">
+            <a:schemeClr val="accent1"/>
+          </a:effectRef>
+          <a:fontRef idx="minor">
+            <a:schemeClr val="lt1"/>
+          </a:fontRef>
+        </p:style>
+        <p:txBody>
+          <a:bodyPr rtlCol="0" anchor="ctr"/>
+          <a:lstStyle/>
+          <a:p>
+            <a:pPr algn="ctr"/>
+          </a:p>
+        </p:txBody>
+      </p:sp>
+      <p:sp>
+        <p:nvSpPr>
+          <p:cNvPr id="3" name="TextBox 2"/>
+          <p:cNvSpPr txBox="1"/>
+          <p:nvPr/>
+        </p:nvSpPr>
+        <p:spPr>
+          <a:xfrm>
+            <a:off x="648000" y="396000"/>
+            <a:ext cx="10897200" cy="936000"/>
+          </a:xfrm>
+          <a:prstGeom prst="rect">
+            <a:avLst/>
+          </a:prstGeom>
+          <a:noFill/>
+        </p:spPr>
+        <p:txBody>
+          <a:bodyPr wrap="square" anchor="t">
+            <a:spAutoFit/>
+          </a:bodyPr>
+          <a:lstStyle/>
+          <a:p>
+            <a:r>
+              <a:rPr sz="4400" b="1" i="0">
+                <a:solidFill>
+                  <a:srgbClr val="0E5C63"/>
+                </a:solidFill>
+                <a:latin typeface="Times New Roman"/>
+              </a:rPr>
+              <a:t>Hướng phát triển</a:t>
+            </a:r>
+          </a:p>
+        </p:txBody>
+      </p:sp>
+      <p:sp>
+        <p:nvSpPr>
+          <p:cNvPr id="4" name="TextBox 3"/>
+          <p:cNvSpPr txBox="1"/>
+          <p:nvPr/>
+        </p:nvSpPr>
+        <p:spPr>
+          <a:xfrm>
+            <a:off x="648000" y="1584000"/>
+            <a:ext cx="10897200" cy="4770001"/>
+          </a:xfrm>
+          <a:prstGeom prst="rect">
+            <a:avLst/>
+          </a:prstGeom>
+          <a:noFill/>
+        </p:spPr>
+        <p:txBody>
+          <a:bodyPr wrap="square" anchor="t">
+            <a:spAutoFit/>
+          </a:bodyPr>
+          <a:lstStyle/>
+          <a:p>
+            <a:pPr marL="324000" indent="-324000">
+              <a:spcAft>
+                <a:spcPts val="1600"/>
+              </a:spcAft>
+            </a:pPr>
+            <a:r>
+              <a:rPr sz="3200" b="0" i="0">
+                <a:solidFill>
+                  <a:srgbClr val="1A1A17"/>
+                </a:solidFill>
+                <a:latin typeface="Times New Roman"/>
+              </a:rPr>
+              <a:t>▪  Bảng giá theo mùa và theo ngày trong tuần</a:t>
+            </a:r>
+          </a:p>
+          <a:p>
+            <a:pPr marL="324000" indent="-324000">
+              <a:spcAft>
+                <a:spcPts val="1600"/>
+              </a:spcAft>
+            </a:pPr>
+            <a:r>
+              <a:rPr sz="3200" b="0" i="0">
+                <a:solidFill>
+                  <a:srgbClr val="1A1A17"/>
+                </a:solidFill>
+                <a:latin typeface="Times New Roman"/>
+              </a:rPr>
+              <a:t>▪  Ứng dụng di động — dùng lại nguyên giao diện lập trình ứng dụng</a:t>
+            </a:r>
+          </a:p>
+          <a:p>
+            <a:pPr marL="324000" indent="-324000">
+              <a:spcAft>
+                <a:spcPts val="1600"/>
+              </a:spcAft>
+            </a:pPr>
+            <a:r>
+              <a:rPr sz="3200" b="0" i="0">
+                <a:solidFill>
+                  <a:srgbClr val="1A1A17"/>
+                </a:solidFill>
+                <a:latin typeface="Times New Roman"/>
+              </a:rPr>
+              <a:t>▪  Đồng bộ lịch hai chiều với sàn trung gian</a:t>
+            </a:r>
+          </a:p>
+        </p:txBody>
+      </p:sp>
+    </p:spTree>
+  </p:cSld>
+  <p:clrMapOvr>
+    <a:masterClrMapping/>
+  </p:clrMapOvr>
+</p:sld>
+</file>
+
+<file path=ppt/slides/slide27.xml><?xml version="1.0" encoding="utf-8"?>
+<p:sld xmlns:a="http://schemas.openxmlformats.org/drawingml/2006/main" xmlns:p="http://schemas.openxmlformats.org/presentationml/2006/main" xmlns:r="http://schemas.openxmlformats.org/officeDocument/2006/relationships">
+  <p:cSld>
+    <p:bg>
+      <p:bgPr>
+        <a:solidFill>
+          <a:srgbClr val="FBF9F6"/>
+        </a:solidFill>
+        <a:effectLst/>
+      </p:bgPr>
+    </p:bg>
+    <p:spTree>
+      <p:nvGrpSpPr>
+        <p:cNvPr id="1" name=""/>
+        <p:cNvGrpSpPr/>
+        <p:nvPr/>
+      </p:nvGrpSpPr>
+      <p:grpSpPr/>
+      <p:sp>
+        <p:nvSpPr>
+          <p:cNvPr id="2" name="Rectangle 1"/>
+          <p:cNvSpPr/>
+          <p:nvPr/>
+        </p:nvSpPr>
+        <p:spPr>
+          <a:xfrm>
+            <a:off x="0" y="0"/>
+            <a:ext cx="12193200" cy="144000"/>
+          </a:xfrm>
+          <a:prstGeom prst="rect">
+            <a:avLst/>
+          </a:prstGeom>
+          <a:solidFill>
+            <a:srgbClr val="0E5C63"/>
+          </a:solidFill>
+          <a:ln>
+            <a:noFill/>
+          </a:ln>
+        </p:spPr>
+        <p:style>
+          <a:lnRef idx="1">
+            <a:schemeClr val="accent1"/>
+          </a:lnRef>
+          <a:fillRef idx="3">
+            <a:schemeClr val="accent1"/>
+          </a:fillRef>
+          <a:effectRef idx="2">
+            <a:schemeClr val="accent1"/>
+          </a:effectRef>
+          <a:fontRef idx="minor">
+            <a:schemeClr val="lt1"/>
+          </a:fontRef>
+        </p:style>
+        <p:txBody>
+          <a:bodyPr rtlCol="0" anchor="ctr"/>
+          <a:lstStyle/>
+          <a:p>
+            <a:pPr algn="ctr"/>
+          </a:p>
+        </p:txBody>
+      </p:sp>
+      <p:sp>
+        <p:nvSpPr>
+          <p:cNvPr id="3" name="TextBox 2"/>
+          <p:cNvSpPr txBox="1"/>
+          <p:nvPr/>
+        </p:nvSpPr>
+        <p:spPr>
+          <a:xfrm>
+            <a:off x="648000" y="396000"/>
+            <a:ext cx="10897200" cy="936000"/>
+          </a:xfrm>
+          <a:prstGeom prst="rect">
+            <a:avLst/>
+          </a:prstGeom>
+          <a:noFill/>
+        </p:spPr>
+        <p:txBody>
+          <a:bodyPr wrap="square" anchor="t">
+            <a:spAutoFit/>
+          </a:bodyPr>
+          <a:lstStyle/>
+          <a:p>
+            <a:r>
+              <a:rPr sz="4400" b="1" i="0">
+                <a:solidFill>
+                  <a:srgbClr val="0E5C63"/>
+                </a:solidFill>
+                <a:latin typeface="Times New Roman"/>
+              </a:rPr>
+              <a:t>Liên kết</a:t>
+            </a:r>
+          </a:p>
+        </p:txBody>
+      </p:sp>
+      <p:sp>
+        <p:nvSpPr>
+          <p:cNvPr id="4" name="TextBox 3"/>
+          <p:cNvSpPr txBox="1"/>
+          <p:nvPr/>
+        </p:nvSpPr>
+        <p:spPr>
+          <a:xfrm>
+            <a:off x="648000" y="1584000"/>
+            <a:ext cx="10897200" cy="4770001"/>
+          </a:xfrm>
+          <a:prstGeom prst="rect">
+            <a:avLst/>
+          </a:prstGeom>
+          <a:noFill/>
+        </p:spPr>
+        <p:txBody>
+          <a:bodyPr wrap="square" anchor="t">
+            <a:spAutoFit/>
+          </a:bodyPr>
+          <a:lstStyle/>
+          <a:p>
+            <a:pPr marL="324000" indent="-324000">
+              <a:spcAft>
+                <a:spcPts val="1600"/>
+              </a:spcAft>
+            </a:pPr>
+            <a:r>
+              <a:rPr sz="3200" b="0" i="0">
+                <a:solidFill>
+                  <a:srgbClr val="1A1A17"/>
+                </a:solidFill>
+                <a:latin typeface="Times New Roman"/>
+              </a:rPr>
+              <a:t>▪  Video thuyết trình:  «DÁN LIÊN KẾT GOOGLE DRIVE VÀO ĐÂY»</a:t>
+            </a:r>
+          </a:p>
+          <a:p>
+            <a:pPr marL="324000" indent="-324000">
+              <a:spcAft>
+                <a:spcPts val="1600"/>
+              </a:spcAft>
+            </a:pPr>
+            <a:r>
+              <a:rPr sz="3200" b="0" i="0">
+                <a:solidFill>
+                  <a:srgbClr val="1A1A17"/>
+                </a:solidFill>
+                <a:latin typeface="Times New Roman"/>
+              </a:rPr>
+              <a:t>▪  Mã nguồn và toàn bộ tài liệu:</a:t>
+            </a:r>
+          </a:p>
+          <a:p>
+            <a:pPr marL="324000" indent="-324000">
+              <a:spcAft>
+                <a:spcPts val="1600"/>
+              </a:spcAft>
+            </a:pPr>
+            <a:r>
+              <a:rPr sz="3200" b="0" i="0">
+                <a:solidFill>
+                  <a:srgbClr val="1A1A17"/>
+                </a:solidFill>
+                <a:latin typeface="Times New Roman"/>
+              </a:rPr>
+              <a:t>▪  github.com/nhquan403/cn-dx23tt11-nguyenhongquan-homestay-tvu</a:t>
+            </a:r>
+          </a:p>
+          <a:p>
+            <a:pPr marL="324000" indent="-324000">
+              <a:spcAft>
+                <a:spcPts val="1600"/>
+              </a:spcAft>
+            </a:pPr>
+            <a:r>
+              <a:rPr sz="3200" b="0" i="0">
+                <a:solidFill>
+                  <a:srgbClr val="1A1A17"/>
+                </a:solidFill>
+                <a:latin typeface="Times New Roman"/>
+              </a:rPr>
+              <a:t>▪  Bản trình diễn hệ thống 10 phút: thesis/abs/ trong kho mã nguồn</a:t>
+            </a:r>
+          </a:p>
+        </p:txBody>
+      </p:sp>
+    </p:spTree>
+  </p:cSld>
+  <p:clrMapOvr>
+    <a:masterClrMapping/>
+  </p:clrMapOvr>
+</p:sld>
+</file>
+
+<file path=ppt/slides/slide28.xml><?xml version="1.0" encoding="utf-8"?>
 <p:sld xmlns:a="http://schemas.openxmlformats.org/drawingml/2006/main" xmlns:p="http://schemas.openxmlformats.org/presentationml/2006/main" xmlns:r="http://schemas.openxmlformats.org/officeDocument/2006/relationships">
   <p:cSld>
     <p:bg>
@@ -7412,13 +9011,13 @@
           <a:lstStyle/>
           <a:p>
             <a:r>
-              <a:rPr sz="3600" b="1" i="0">
+              <a:rPr sz="4400" b="1" i="0">
                 <a:solidFill>
                   <a:srgbClr val="0E5C63"/>
                 </a:solidFill>
                 <a:latin typeface="Times New Roman"/>
               </a:rPr>
-              <a:t>Bài toán cốt lõi: không được bán trùng phòng</a:t>
+              <a:t>Vì sao không đưa lên sàn có sẵn</a:t>
             </a:r>
           </a:p>
         </p:txBody>
@@ -7457,7 +9056,7 @@
                 </a:solidFill>
                 <a:latin typeface="Times New Roman"/>
               </a:rPr>
-              <a:t>▪  Hai khách liên hệ gần như cùng lúc</a:t>
+              <a:t>▪  Sàn thu 15–20% mỗi đơn — với homestay nhỏ là phần lớn lợi nhuận</a:t>
             </a:r>
           </a:p>
           <a:p>
@@ -7473,7 +9072,7 @@
                 </a:solidFill>
                 <a:latin typeface="Times New Roman"/>
               </a:rPr>
-              <a:t>▪  Chủ nhà trả lời còn phòng cho cả hai</a:t>
+              <a:t>▪  Chủ nhà không sở hữu dữ liệu khách của chính mình</a:t>
             </a:r>
           </a:p>
           <a:p>
@@ -7489,7 +9088,7 @@
                 </a:solidFill>
                 <a:latin typeface="Times New Roman"/>
               </a:rPr>
-              <a:t>▪  Sai sót chỉ lộ ra vào ngày nhận phòng</a:t>
+              <a:t>▪  Vẫn phải tự giữ một lịch riêng cho khách đặt trực tiếp</a:t>
             </a:r>
           </a:p>
         </p:txBody>
@@ -7586,13 +9185,13 @@
           <a:lstStyle/>
           <a:p>
             <a:r>
-              <a:rPr sz="4400" b="1" i="0">
+              <a:rPr sz="3600" b="1" i="0">
                 <a:solidFill>
                   <a:srgbClr val="0E5C63"/>
                 </a:solidFill>
                 <a:latin typeface="Times New Roman"/>
               </a:rPr>
-              <a:t>Quy ước nửa mở cho khoảng ngày</a:t>
+              <a:t>Bài toán cốt lõi: không được bán trùng phòng</a:t>
             </a:r>
           </a:p>
         </p:txBody>
@@ -7606,7 +9205,7 @@
         <p:spPr>
           <a:xfrm>
             <a:off x="648000" y="1584000"/>
-            <a:ext cx="5220000" cy="4770001"/>
+            <a:ext cx="10897200" cy="4770001"/>
           </a:xfrm>
           <a:prstGeom prst="rect">
             <a:avLst/>
@@ -7625,13 +9224,13 @@
               </a:spcAft>
             </a:pPr>
             <a:r>
-              <a:rPr sz="2800" b="0" i="0">
+              <a:rPr sz="3200" b="0" i="0">
                 <a:solidFill>
                   <a:srgbClr val="1A1A17"/>
                 </a:solidFill>
                 <a:latin typeface="Times New Roman"/>
               </a:rPr>
-              <a:t>▪  Trả phòng 10/03 và nhận phòng 10/03 KHÔNG chồng lấn</a:t>
+              <a:t>▪  Hai khách liên hệ gần như cùng lúc</a:t>
             </a:r>
           </a:p>
           <a:p>
@@ -7641,13 +9240,13 @@
               </a:spcAft>
             </a:pPr>
             <a:r>
-              <a:rPr sz="2800" b="0" i="0">
+              <a:rPr sz="3200" b="0" i="0">
                 <a:solidFill>
                   <a:srgbClr val="1A1A17"/>
                 </a:solidFill>
                 <a:latin typeface="Times New Roman"/>
               </a:rPr>
-              <a:t>▪  Viết là [nhận, trả) — chứa ngày đầu, không chứa ngày cuối</a:t>
+              <a:t>▪  Chủ nhà trả lời còn phòng cho cả hai</a:t>
             </a:r>
           </a:p>
           <a:p>
@@ -7657,41 +9256,17 @@
               </a:spcAft>
             </a:pPr>
             <a:r>
-              <a:rPr sz="2800" b="0" i="0">
+              <a:rPr sz="3200" b="0" i="0">
                 <a:solidFill>
                   <a:srgbClr val="1A1A17"/>
                 </a:solidFill>
                 <a:latin typeface="Times New Roman"/>
               </a:rPr>
-              <a:t>▪  Sai quy ước này là mất một đêm bán được của mỗi phòng</a:t>
-            </a:r>
-          </a:p>
-        </p:txBody>
-      </p:sp>
-      <p:pic>
-        <p:nvPicPr>
-          <p:cNvPr id="5" name="Picture 4" descr="hinh-1-1-khoang-nua-mo.png"/>
-          <p:cNvPicPr>
-            <a:picLocks noChangeAspect="1"/>
-          </p:cNvPicPr>
-          <p:nvPr/>
-        </p:nvPicPr>
-        <p:blipFill>
-          <a:blip r:embed="rId2"/>
-          <a:stretch>
-            <a:fillRect/>
-          </a:stretch>
-        </p:blipFill>
-        <p:spPr>
-          <a:xfrm>
-            <a:off x="6379436" y="1584000"/>
-            <a:ext cx="4953126" cy="4770000"/>
-          </a:xfrm>
-          <a:prstGeom prst="rect">
-            <a:avLst/>
-          </a:prstGeom>
-        </p:spPr>
-      </p:pic>
+              <a:t>▪  Sai sót chỉ lộ ra vào ngày nhận phòng</a:t>
+            </a:r>
+          </a:p>
+        </p:txBody>
+      </p:sp>
     </p:spTree>
   </p:cSld>
   <p:clrMapOvr>
@@ -7790,7 +9365,7 @@
                 </a:solidFill>
                 <a:latin typeface="Times New Roman"/>
               </a:rPr>
-              <a:t>Mục tiêu và phạm vi</a:t>
+              <a:t>Quy ước nửa mở cho khoảng ngày</a:t>
             </a:r>
           </a:p>
         </p:txBody>
@@ -7804,7 +9379,7 @@
         <p:spPr>
           <a:xfrm>
             <a:off x="648000" y="1584000"/>
-            <a:ext cx="10897200" cy="4770001"/>
+            <a:ext cx="5220000" cy="4770001"/>
           </a:xfrm>
           <a:prstGeom prst="rect">
             <a:avLst/>
@@ -7823,13 +9398,13 @@
               </a:spcAft>
             </a:pPr>
             <a:r>
-              <a:rPr sz="3200" b="0" i="0">
+              <a:rPr sz="2800" b="0" i="0">
                 <a:solidFill>
                   <a:srgbClr val="1A1A17"/>
                 </a:solidFill>
                 <a:latin typeface="Times New Roman"/>
               </a:rPr>
-              <a:t>▪  Ba khối: trang khách, khu quản trị, giao diện lập trình ứng dụng</a:t>
+              <a:t>▪  Trả phòng 10/03 và nhận phòng 10/03 KHÔNG chồng lấn</a:t>
             </a:r>
           </a:p>
           <a:p>
@@ -7839,13 +9414,13 @@
               </a:spcAft>
             </a:pPr>
             <a:r>
-              <a:rPr sz="3200" b="0" i="0">
+              <a:rPr sz="2800" b="0" i="0">
                 <a:solidFill>
                   <a:srgbClr val="1A1A17"/>
                 </a:solidFill>
                 <a:latin typeface="Times New Roman"/>
               </a:rPr>
-              <a:t>▪  Đặt cọc qua mã QR, webhook tự xác nhận</a:t>
+              <a:t>▪  Viết là [nhận, trả) — chứa ngày đầu, không chứa ngày cuối</a:t>
             </a:r>
           </a:p>
           <a:p>
@@ -7855,33 +9430,41 @@
               </a:spcAft>
             </a:pPr>
             <a:r>
-              <a:rPr sz="3200" b="0" i="0">
+              <a:rPr sz="2800" b="0" i="0">
                 <a:solidFill>
                   <a:srgbClr val="1A1A17"/>
                 </a:solidFill>
                 <a:latin typeface="Times New Roman"/>
               </a:rPr>
-              <a:t>▪  Không có nhánh nào để tiền của khách biến mất im lặng</a:t>
-            </a:r>
-          </a:p>
-          <a:p>
-            <a:pPr marL="324000" indent="-324000">
-              <a:spcAft>
-                <a:spcPts val="1600"/>
-              </a:spcAft>
-            </a:pPr>
-            <a:r>
-              <a:rPr sz="3200" b="0" i="0">
-                <a:solidFill>
-                  <a:srgbClr val="1A1A17"/>
-                </a:solidFill>
-                <a:latin typeface="Times New Roman"/>
-              </a:rPr>
-              <a:t>▪  Một lệnh là đủ để chạy toàn hệ thống kèm dữ liệu mẫu</a:t>
-            </a:r>
-          </a:p>
-        </p:txBody>
-      </p:sp>
+              <a:t>▪  Sai quy ước này là mất một đêm bán được của mỗi phòng</a:t>
+            </a:r>
+          </a:p>
+        </p:txBody>
+      </p:sp>
+      <p:pic>
+        <p:nvPicPr>
+          <p:cNvPr id="5" name="Picture 4" descr="hinh-1-1-khoang-nua-mo.png"/>
+          <p:cNvPicPr>
+            <a:picLocks noChangeAspect="1"/>
+          </p:cNvPicPr>
+          <p:nvPr/>
+        </p:nvPicPr>
+        <p:blipFill>
+          <a:blip r:embed="rId2"/>
+          <a:stretch>
+            <a:fillRect/>
+          </a:stretch>
+        </p:blipFill>
+        <p:spPr>
+          <a:xfrm>
+            <a:off x="6379436" y="1584000"/>
+            <a:ext cx="4953126" cy="4770000"/>
+          </a:xfrm>
+          <a:prstGeom prst="rect">
+            <a:avLst/>
+          </a:prstGeom>
+        </p:spPr>
+      </p:pic>
     </p:spTree>
   </p:cSld>
   <p:clrMapOvr>
@@ -7980,7 +9563,7 @@
                 </a:solidFill>
                 <a:latin typeface="Times New Roman"/>
               </a:rPr>
-              <a:t>Công nghệ sử dụng</a:t>
+              <a:t>Mục tiêu và phạm vi</a:t>
             </a:r>
           </a:p>
         </p:txBody>
@@ -8019,7 +9602,7 @@
                 </a:solidFill>
                 <a:latin typeface="Times New Roman"/>
               </a:rPr>
-              <a:t>▪  Máy chủ: Java 21, Spring Boot 3.5</a:t>
+              <a:t>▪  Ba khối: trang khách, khu quản trị, giao diện lập trình ứng dụng</a:t>
             </a:r>
           </a:p>
           <a:p>
@@ -8035,7 +9618,7 @@
                 </a:solidFill>
                 <a:latin typeface="Times New Roman"/>
               </a:rPr>
-              <a:t>▪  Giao diện: Angular 21, Tailwind CSS v4</a:t>
+              <a:t>▪  Đặt cọc qua mã QR, webhook tự xác nhận</a:t>
             </a:r>
           </a:p>
           <a:p>
@@ -8051,7 +9634,7 @@
                 </a:solidFill>
                 <a:latin typeface="Times New Roman"/>
               </a:rPr>
-              <a:t>▪  Cơ sở dữ liệu: PostgreSQL 16 — chọn vì một lý do rất cụ thể</a:t>
+              <a:t>▪  Không có nhánh nào để tiền của khách biến mất im lặng</a:t>
             </a:r>
           </a:p>
           <a:p>
@@ -8067,7 +9650,7 @@
                 </a:solidFill>
                 <a:latin typeface="Times New Roman"/>
               </a:rPr>
-              <a:t>▪  Đóng gói: Docker Compose, bốn dịch vụ</a:t>
+              <a:t>▪  Một lệnh là đủ để chạy toàn hệ thống kèm dữ liệu mẫu</a:t>
             </a:r>
           </a:p>
         </p:txBody>
@@ -8164,20 +9747,20 @@
           <a:lstStyle/>
           <a:p>
             <a:r>
-              <a:rPr sz="4400" b="1" i="0">
+              <a:rPr sz="3600" b="1" i="0">
                 <a:solidFill>
                   <a:srgbClr val="0E5C63"/>
                 </a:solidFill>
                 <a:latin typeface="Times New Roman"/>
               </a:rPr>
-              <a:t>Kiến trúc tổng thể</a:t>
+              <a:t>Phân tích chức năng: 11 use case, 4 tác nhân</a:t>
             </a:r>
           </a:p>
         </p:txBody>
       </p:sp>
       <p:pic>
         <p:nvPicPr>
-          <p:cNvPr id="4" name="Picture 3" descr="hinh-2-1-kien-truc-tong-the.png"/>
+          <p:cNvPr id="4" name="Picture 3" descr="hinh-3-1-use-case.png"/>
           <p:cNvPicPr>
             <a:picLocks noChangeAspect="1"/>
           </p:cNvPicPr>
@@ -8191,8 +9774,8 @@
         </p:blipFill>
         <p:spPr>
           <a:xfrm>
-            <a:off x="1080000" y="2858618"/>
-            <a:ext cx="10033200" cy="2220763"/>
+            <a:off x="1389363" y="1584000"/>
+            <a:ext cx="9414473" cy="4770000"/>
           </a:xfrm>
           <a:prstGeom prst="rect">
             <a:avLst/>
@@ -8291,13 +9874,13 @@
           <a:lstStyle/>
           <a:p>
             <a:r>
-              <a:rPr sz="4000" b="1" i="0">
+              <a:rPr sz="4400" b="1" i="0">
                 <a:solidFill>
                   <a:srgbClr val="0E5C63"/>
                 </a:solidFill>
                 <a:latin typeface="Times New Roman"/>
               </a:rPr>
-              <a:t>Vì sao kiểm tra ở tầng ứng dụng KHÔNG đủ</a:t>
+              <a:t>Công nghệ sử dụng</a:t>
             </a:r>
           </a:p>
         </p:txBody>
@@ -8311,7 +9894,7 @@
         <p:spPr>
           <a:xfrm>
             <a:off x="648000" y="1584000"/>
-            <a:ext cx="5220000" cy="4770001"/>
+            <a:ext cx="10897200" cy="4770001"/>
           </a:xfrm>
           <a:prstGeom prst="rect">
             <a:avLst/>
@@ -8330,13 +9913,13 @@
               </a:spcAft>
             </a:pPr>
             <a:r>
-              <a:rPr sz="2800" b="0" i="0">
+              <a:rPr sz="3200" b="0" i="0">
                 <a:solidFill>
                   <a:srgbClr val="1A1A17"/>
                 </a:solidFill>
                 <a:latin typeface="Times New Roman"/>
               </a:rPr>
-              <a:t>▪  Luồng 1 đọc: còn phòng → Luồng 2 đọc: còn phòng</a:t>
+              <a:t>▪  Máy chủ: Java 21, Spring Boot 3.5</a:t>
             </a:r>
           </a:p>
           <a:p>
@@ -8346,13 +9929,13 @@
               </a:spcAft>
             </a:pPr>
             <a:r>
-              <a:rPr sz="2800" b="0" i="0">
+              <a:rPr sz="3200" b="0" i="0">
                 <a:solidFill>
                   <a:srgbClr val="1A1A17"/>
                 </a:solidFill>
                 <a:latin typeface="Times New Roman"/>
               </a:rPr>
-              <a:t>▪  Cả hai cùng ghi → bán trùng</a:t>
+              <a:t>▪  Giao diện: Angular 21, Tailwind CSS v4</a:t>
             </a:r>
           </a:p>
           <a:p>
@@ -8362,13 +9945,13 @@
               </a:spcAft>
             </a:pPr>
             <a:r>
-              <a:rPr sz="2800" b="0" i="0">
+              <a:rPr sz="3200" b="0" i="0">
                 <a:solidFill>
                   <a:srgbClr val="1A1A17"/>
                 </a:solidFill>
                 <a:latin typeface="Times New Roman"/>
               </a:rPr>
-              <a:t>▪  Mức cô lập Read Committed không ngăn được</a:t>
+              <a:t>▪  Cơ sở dữ liệu: PostgreSQL 16 — chọn vì một lý do rất cụ thể</a:t>
             </a:r>
           </a:p>
           <a:p>
@@ -8378,41 +9961,17 @@
               </a:spcAft>
             </a:pPr>
             <a:r>
-              <a:rPr sz="2800" b="0" i="0">
+              <a:rPr sz="3200" b="0" i="0">
                 <a:solidFill>
                   <a:srgbClr val="1A1A17"/>
                 </a:solidFill>
                 <a:latin typeface="Times New Roman"/>
               </a:rPr>
-              <a:t>▪  Tài liệu PostgreSQL khuyên dùng ràng buộc toàn vẹn</a:t>
-            </a:r>
-          </a:p>
-        </p:txBody>
-      </p:sp>
-      <p:pic>
-        <p:nvPicPr>
-          <p:cNvPr id="5" name="Picture 4" descr="hinh-2-2-tranh-chap-dat-phong.png"/>
-          <p:cNvPicPr>
-            <a:picLocks noChangeAspect="1"/>
-          </p:cNvPicPr>
-          <p:nvPr/>
-        </p:nvPicPr>
-        <p:blipFill>
-          <a:blip r:embed="rId2"/>
-          <a:stretch>
-            <a:fillRect/>
-          </a:stretch>
-        </p:blipFill>
-        <p:spPr>
-          <a:xfrm>
-            <a:off x="7094489" y="1584000"/>
-            <a:ext cx="3523020" cy="4770000"/>
-          </a:xfrm>
-          <a:prstGeom prst="rect">
-            <a:avLst/>
-          </a:prstGeom>
-        </p:spPr>
-      </p:pic>
+              <a:t>▪  Đóng gói: Docker Compose, bốn dịch vụ</a:t>
+            </a:r>
+          </a:p>
+        </p:txBody>
+      </p:sp>
     </p:spTree>
   </p:cSld>
   <p:clrMapOvr>

--- a/thesis/abs/slide-bao-ve.pptx
+++ b/thesis/abs/slide-bao-ve.pptx
@@ -8591,7 +8591,23 @@
                 </a:solidFill>
                 <a:latin typeface="Times New Roman"/>
               </a:rPr>
-              <a:t>▪  Video thuyết trình:  «DÁN LIÊN KẾT GOOGLE DRIVE VÀO ĐÂY»</a:t>
+              <a:t>▪  Video thuyết trình:</a:t>
+            </a:r>
+          </a:p>
+          <a:p>
+            <a:pPr marL="324000" indent="-324000">
+              <a:spcAft>
+                <a:spcPts val="1600"/>
+              </a:spcAft>
+            </a:pPr>
+            <a:r>
+              <a:rPr sz="3200" b="0" i="0">
+                <a:solidFill>
+                  <a:srgbClr val="1A1A17"/>
+                </a:solidFill>
+                <a:latin typeface="Times New Roman"/>
+              </a:rPr>
+              <a:t>▪  drive.google.com/file/d/1ROd5S2zjg6JL-6JjTNNbQqxwpGj-5YCJ/view</a:t>
             </a:r>
           </a:p>
           <a:p>
